--- a/assemblies-and-events/world-mental-health-day/downloads/World_Mental_Health_Day_PSHE_Lesson.pptx
+++ b/assemblies-and-events/world-mental-health-day/downloads/World_Mental_Health_Day_PSHE_Lesson.pptx
@@ -6788,7 +6788,7 @@
                 </a:solidFill>
                 <a:latin typeface="Karla"/>
               </a:rPr>
-              <a:t>Tell me which of the four moves you are using as well as the line.</a:t>
+              <a:t>Tell me your line, and which of the four moves it uses.</a:t>
             </a:r>
           </a:p>
         </p:txBody>
@@ -10234,7 +10234,7 @@
                 </a:solidFill>
                 <a:latin typeface="Karla"/>
               </a:rPr>
-              <a:t>If you could not think of anybody for the first one, tell somebody today rather than next term.</a:t>
+              <a:t>If you could not think of anybody for the first one, come and find me today.</a:t>
             </a:r>
           </a:p>
         </p:txBody>
@@ -11249,7 +11249,7 @@
                 </a:solidFill>
                 <a:latin typeface="Karla"/>
               </a:rPr>
-              <a:t>Page 9. Spread them round the room so four pairs are never at the same one.</a:t>
+              <a:t>Page 9. Spread them round the room so pairs do not bunch up at one card.</a:t>
             </a:r>
           </a:p>
         </p:txBody>
@@ -12549,7 +12549,7 @@
                 </a:solidFill>
                 <a:latin typeface="Karla"/>
               </a:rPr>
-              <a:t>Most classes agree quickly on the best two and the worst two. It is the middle pile that takes the time.</a:t>
+              <a:t>Most classes agree the top three and bottom two quickly. The middle pile takes the time.</a:t>
             </a:r>
           </a:p>
         </p:txBody>

--- a/assemblies-and-events/world-mental-health-day/downloads/World_Mental_Health_Day_PSHE_Lesson.pptx
+++ b/assemblies-and-events/world-mental-health-day/downloads/World_Mental_Health_Day_PSHE_Lesson.pptx
@@ -3181,7 +3181,7 @@
         </p:nvSpPr>
         <p:spPr>
           <a:xfrm>
-            <a:off x="548640" y="1485900"/>
+            <a:off x="548640" y="1591056"/>
             <a:ext cx="8046720" cy="1197864"/>
           </a:xfrm>
           <a:prstGeom prst="rect">
@@ -3204,11 +3204,11 @@
               </a:spcAft>
             </a:pPr>
             <a:r>
-              <a:rPr sz="3600" b="1" i="0">
+              <a:rPr sz="3090" b="0" i="0">
                 <a:solidFill>
                   <a:srgbClr val="2C6D5B"/>
                 </a:solidFill>
-                <a:latin typeface="Libre Caslon Display"/>
+                <a:latin typeface="Georgia"/>
               </a:rPr>
               <a:t>When a Friend Tells You</a:t>
             </a:r>
@@ -3216,11 +3216,11 @@
               <a:rPr lang="en-GB"/>
             </a:br>
             <a:r>
-              <a:rPr sz="3600" b="1" i="0">
+              <a:rPr sz="3090" b="0" i="0">
                 <a:solidFill>
                   <a:srgbClr val="2C6D5B"/>
                 </a:solidFill>
-                <a:latin typeface="Libre Caslon Display"/>
+                <a:latin typeface="Georgia"/>
               </a:rPr>
               <a:t>They Are Struggling</a:t>
             </a:r>
@@ -3306,7 +3306,7 @@
                 <a:solidFill>
                   <a:srgbClr val="677974"/>
                 </a:solidFill>
-                <a:latin typeface="Karla"/>
+                <a:latin typeface="Calibri"/>
               </a:rPr>
               <a:t>World Mental Health Day  ·  PSHE lesson</a:t>
             </a:r>
@@ -3348,7 +3348,7 @@
                 <a:solidFill>
                   <a:srgbClr val="A1AFAC"/>
                 </a:solidFill>
-                <a:latin typeface="Karla"/>
+                <a:latin typeface="Calibri"/>
               </a:rPr>
               <a:t>[ DATE ]</a:t>
             </a:r>
@@ -3414,7 +3414,7 @@
                 <a:solidFill>
                   <a:srgbClr val="A1AFAC"/>
                 </a:solidFill>
-                <a:latin typeface="Karla"/>
+                <a:latin typeface="Calibri"/>
               </a:rPr>
               <a:t>The Pastoral Guide</a:t>
             </a:r>
@@ -3456,7 +3456,7 @@
                 <a:solidFill>
                   <a:srgbClr val="A1AFAC"/>
                 </a:solidFill>
-                <a:latin typeface="Karla"/>
+                <a:latin typeface="Calibri"/>
               </a:rPr>
               <a:t>1 / 18</a:t>
             </a:r>
@@ -3573,7 +3573,7 @@
                 <a:solidFill>
                   <a:srgbClr val="2C6D5B"/>
                 </a:solidFill>
-                <a:latin typeface="Karla"/>
+                <a:latin typeface="Calibri"/>
               </a:rPr>
               <a:t>MOVE FOUR</a:t>
             </a:r>
@@ -3611,11 +3611,11 @@
               </a:spcAft>
             </a:pPr>
             <a:r>
-              <a:rPr sz="3000" b="1" i="0">
+              <a:rPr sz="3000" b="0" i="0">
                 <a:solidFill>
                   <a:srgbClr val="3C4945"/>
                 </a:solidFill>
-                <a:latin typeface="Libre Caslon Display"/>
+                <a:latin typeface="Georgia"/>
               </a:rPr>
               <a:t>Stay, and do not carry it alone</a:t>
             </a:r>
@@ -3657,7 +3657,7 @@
                 <a:solidFill>
                   <a:srgbClr val="677974"/>
                 </a:solidFill>
-                <a:latin typeface="Karla"/>
+                <a:latin typeface="Calibri"/>
               </a:rPr>
               <a:t>This is the part that usually gets left out.</a:t>
             </a:r>
@@ -3787,7 +3787,7 @@
                 <a:solidFill>
                   <a:srgbClr val="FFFDF7"/>
                 </a:solidFill>
-                <a:latin typeface="Karla"/>
+                <a:latin typeface="Calibri"/>
               </a:rPr>
               <a:t>1</a:t>
             </a:r>
@@ -3825,11 +3825,11 @@
               </a:spcAft>
             </a:pPr>
             <a:r>
-              <a:rPr sz="1300" b="1" i="0">
+              <a:rPr sz="1300" b="0" i="0">
                 <a:solidFill>
                   <a:srgbClr val="2C6D5B"/>
                 </a:solidFill>
-                <a:latin typeface="Libre Caslon Display"/>
+                <a:latin typeface="Georgia"/>
               </a:rPr>
               <a:t>Do not promise to keep it secret.</a:t>
             </a:r>
@@ -3871,7 +3871,7 @@
                 <a:solidFill>
                   <a:srgbClr val="677974"/>
                 </a:solidFill>
-                <a:latin typeface="Karla"/>
+                <a:latin typeface="Calibri"/>
               </a:rPr>
               <a:t>Say this instead: “I am not going to tell people. If you are in danger I will get help.”</a:t>
             </a:r>
@@ -4001,7 +4001,7 @@
                 <a:solidFill>
                   <a:srgbClr val="FFFDF7"/>
                 </a:solidFill>
-                <a:latin typeface="Karla"/>
+                <a:latin typeface="Calibri"/>
               </a:rPr>
               <a:t>2</a:t>
             </a:r>
@@ -4039,11 +4039,11 @@
               </a:spcAft>
             </a:pPr>
             <a:r>
-              <a:rPr sz="1300" b="1" i="0">
+              <a:rPr sz="1300" b="0" i="0">
                 <a:solidFill>
                   <a:srgbClr val="2C6D5B"/>
                 </a:solidFill>
-                <a:latin typeface="Libre Caslon Display"/>
+                <a:latin typeface="Georgia"/>
               </a:rPr>
               <a:t>Tell one adult, and tell your friend you are telling them.</a:t>
             </a:r>
@@ -4085,7 +4085,7 @@
                 <a:solidFill>
                   <a:srgbClr val="677974"/>
                 </a:solidFill>
-                <a:latin typeface="Karla"/>
+                <a:latin typeface="Calibri"/>
               </a:rPr>
               <a:t>[ NAMED STAFF ], your form tutor, or any teacher you would actually talk to.</a:t>
             </a:r>
@@ -4215,7 +4215,7 @@
                 <a:solidFill>
                   <a:srgbClr val="FFFDF7"/>
                 </a:solidFill>
-                <a:latin typeface="Karla"/>
+                <a:latin typeface="Calibri"/>
               </a:rPr>
               <a:t>3</a:t>
             </a:r>
@@ -4253,11 +4253,11 @@
               </a:spcAft>
             </a:pPr>
             <a:r>
-              <a:rPr sz="1300" b="1" i="0">
+              <a:rPr sz="1300" b="0" i="0">
                 <a:solidFill>
                   <a:srgbClr val="2C6D5B"/>
                 </a:solidFill>
-                <a:latin typeface="Libre Caslon Display"/>
+                <a:latin typeface="Georgia"/>
               </a:rPr>
               <a:t>Go back to them a couple of days later.</a:t>
             </a:r>
@@ -4299,7 +4299,7 @@
                 <a:solidFill>
                   <a:srgbClr val="677974"/>
                 </a:solidFill>
-                <a:latin typeface="Karla"/>
+                <a:latin typeface="Calibri"/>
               </a:rPr>
               <a:t>“How has this week been?” is the whole message. It does not have to be a big conversation.</a:t>
             </a:r>
@@ -4341,7 +4341,7 @@
                 <a:solidFill>
                   <a:srgbClr val="2C6D5B"/>
                 </a:solidFill>
-                <a:latin typeface="Karla"/>
+                <a:latin typeface="Calibri"/>
               </a:rPr>
               <a:t>You are their friend, not their counsellor. Nobody expects you to be.</a:t>
             </a:r>
@@ -4407,7 +4407,7 @@
                 <a:solidFill>
                   <a:srgbClr val="A1AFAC"/>
                 </a:solidFill>
-                <a:latin typeface="Karla"/>
+                <a:latin typeface="Calibri"/>
               </a:rPr>
               <a:t>The Pastoral Guide</a:t>
             </a:r>
@@ -4449,7 +4449,7 @@
                 <a:solidFill>
                   <a:srgbClr val="A1AFAC"/>
                 </a:solidFill>
-                <a:latin typeface="Karla"/>
+                <a:latin typeface="Calibri"/>
               </a:rPr>
               <a:t>10 / 18</a:t>
             </a:r>
@@ -4520,61 +4520,6 @@
       </p:sp>
       <p:sp>
         <p:nvSpPr>
-          <p:cNvPr id="3" name="Rounded Rectangle 2"/>
-          <p:cNvSpPr/>
-          <p:nvPr/>
-        </p:nvSpPr>
-        <p:spPr>
-          <a:xfrm>
-            <a:off x="685800" y="530352"/>
-            <a:ext cx="906566" cy="237744"/>
-          </a:xfrm>
-          <a:prstGeom prst="roundRect">
-            <a:avLst>
-              <a:gd name="adj" fmla="val 50000"/>
-            </a:avLst>
-          </a:prstGeom>
-          <a:solidFill>
-            <a:srgbClr val="ECF4F2"/>
-          </a:solidFill>
-          <a:ln>
-            <a:noFill/>
-          </a:ln>
-          <a:effectLst/>
-        </p:spPr>
-        <p:style>
-          <a:lnRef idx="1">
-            <a:schemeClr val="accent1"/>
-          </a:lnRef>
-          <a:fillRef idx="3">
-            <a:schemeClr val="accent1"/>
-          </a:fillRef>
-          <a:effectRef idx="2">
-            <a:schemeClr val="accent1"/>
-          </a:effectRef>
-          <a:fontRef idx="minor">
-            <a:schemeClr val="lt1"/>
-          </a:fontRef>
-        </p:style>
-        <p:txBody>
-          <a:bodyPr rtlCol="0" anchor="ctr" wrap="none" lIns="0" rIns="0" tIns="0" bIns="0"/>
-          <a:lstStyle/>
-          <a:p>
-            <a:pPr algn="ctr"/>
-            <a:r>
-              <a:rPr sz="950" b="1" spc="90">
-                <a:solidFill>
-                  <a:srgbClr val="2C6D5B"/>
-                </a:solidFill>
-                <a:latin typeface="Karla"/>
-              </a:rPr>
-              <a:t>READ IT</a:t>
-            </a:r>
-          </a:p>
-        </p:txBody>
-      </p:sp>
-      <p:sp>
-        <p:nvSpPr>
           <p:cNvPr id="4" name="TextBox 3"/>
           <p:cNvSpPr txBox="1"/>
           <p:nvPr/>
@@ -4604,11 +4549,11 @@
               </a:spcAft>
             </a:pPr>
             <a:r>
-              <a:rPr sz="3000" b="1" i="0">
+              <a:rPr sz="3000" b="0" i="0">
                 <a:solidFill>
                   <a:srgbClr val="3C4945"/>
                 </a:solidFill>
-                <a:latin typeface="Libre Caslon Display"/>
+                <a:latin typeface="Georgia"/>
               </a:rPr>
               <a:t>Nobody in this is being unkind</a:t>
             </a:r>
@@ -4650,7 +4595,7 @@
                 <a:solidFill>
                   <a:srgbClr val="327B68"/>
                 </a:solidFill>
-                <a:latin typeface="Karla"/>
+                <a:latin typeface="Calibri"/>
               </a:rPr>
               <a:t>SAM</a:t>
             </a:r>
@@ -4692,7 +4637,7 @@
                 <a:solidFill>
                   <a:srgbClr val="3C4945"/>
                 </a:solidFill>
-                <a:latin typeface="Karla"/>
+                <a:latin typeface="Calibri"/>
               </a:rPr>
               <a:t>“I have been feeling rubbish for a few weeks now.”</a:t>
             </a:r>
@@ -4734,7 +4679,7 @@
                 <a:solidFill>
                   <a:srgbClr val="327B68"/>
                 </a:solidFill>
-                <a:latin typeface="Karla"/>
+                <a:latin typeface="Calibri"/>
               </a:rPr>
               <a:t>JAY</a:t>
             </a:r>
@@ -4776,7 +4721,7 @@
                 <a:solidFill>
                   <a:srgbClr val="3C4945"/>
                 </a:solidFill>
-                <a:latin typeface="Karla"/>
+                <a:latin typeface="Calibri"/>
               </a:rPr>
               <a:t>“Ah, you will be fine. Everyone gets like that.”</a:t>
             </a:r>
@@ -4818,7 +4763,7 @@
                 <a:solidFill>
                   <a:srgbClr val="327B68"/>
                 </a:solidFill>
-                <a:latin typeface="Karla"/>
+                <a:latin typeface="Calibri"/>
               </a:rPr>
               <a:t>SAM</a:t>
             </a:r>
@@ -4860,7 +4805,7 @@
                 <a:solidFill>
                   <a:srgbClr val="3C4945"/>
                 </a:solidFill>
-                <a:latin typeface="Karla"/>
+                <a:latin typeface="Calibri"/>
               </a:rPr>
               <a:t>“Yeah. Probably.”</a:t>
             </a:r>
@@ -4902,7 +4847,7 @@
                 <a:solidFill>
                   <a:srgbClr val="327B68"/>
                 </a:solidFill>
-                <a:latin typeface="Karla"/>
+                <a:latin typeface="Calibri"/>
               </a:rPr>
               <a:t>JAY</a:t>
             </a:r>
@@ -4944,7 +4889,7 @@
                 <a:solidFill>
                   <a:srgbClr val="3C4945"/>
                 </a:solidFill>
-                <a:latin typeface="Karla"/>
+                <a:latin typeface="Calibri"/>
               </a:rPr>
               <a:t>“Have you tried getting out more? That sorted me right out.”</a:t>
             </a:r>
@@ -4986,7 +4931,7 @@
                 <a:solidFill>
                   <a:srgbClr val="327B68"/>
                 </a:solidFill>
-                <a:latin typeface="Karla"/>
+                <a:latin typeface="Calibri"/>
               </a:rPr>
               <a:t>SAM</a:t>
             </a:r>
@@ -5028,7 +4973,7 @@
                 <a:solidFill>
                   <a:srgbClr val="3C4945"/>
                 </a:solidFill>
-                <a:latin typeface="Karla"/>
+                <a:latin typeface="Calibri"/>
               </a:rPr>
               <a:t>“Maybe.”</a:t>
             </a:r>
@@ -5070,7 +5015,7 @@
                 <a:solidFill>
                   <a:srgbClr val="327B68"/>
                 </a:solidFill>
-                <a:latin typeface="Karla"/>
+                <a:latin typeface="Calibri"/>
               </a:rPr>
               <a:t>JAY</a:t>
             </a:r>
@@ -5112,7 +5057,7 @@
                 <a:solidFill>
                   <a:srgbClr val="3C4945"/>
                 </a:solidFill>
-                <a:latin typeface="Karla"/>
+                <a:latin typeface="Calibri"/>
               </a:rPr>
               <a:t>“Anyway. Are you coming on Saturday?”</a:t>
             </a:r>
@@ -5154,7 +5099,7 @@
                 <a:solidFill>
                   <a:srgbClr val="677974"/>
                 </a:solidFill>
-                <a:latin typeface="Karla"/>
+                <a:latin typeface="Calibri"/>
               </a:rPr>
               <a:t>Find the line where Sam stops telling the truth, and say which of the four moves would have kept it going.</a:t>
             </a:r>
@@ -5220,7 +5165,7 @@
                 <a:solidFill>
                   <a:srgbClr val="A1AFAC"/>
                 </a:solidFill>
-                <a:latin typeface="Karla"/>
+                <a:latin typeface="Calibri"/>
               </a:rPr>
               <a:t>The Pastoral Guide</a:t>
             </a:r>
@@ -5262,7 +5207,7 @@
                 <a:solidFill>
                   <a:srgbClr val="A1AFAC"/>
                 </a:solidFill>
-                <a:latin typeface="Karla"/>
+                <a:latin typeface="Calibri"/>
               </a:rPr>
               <a:t>11 / 18</a:t>
             </a:r>
@@ -5333,61 +5278,6 @@
       </p:sp>
       <p:sp>
         <p:nvSpPr>
-          <p:cNvPr id="3" name="Rounded Rectangle 2"/>
-          <p:cNvSpPr/>
-          <p:nvPr/>
-        </p:nvSpPr>
-        <p:spPr>
-          <a:xfrm>
-            <a:off x="685800" y="530352"/>
-            <a:ext cx="1431257" cy="237744"/>
-          </a:xfrm>
-          <a:prstGeom prst="roundRect">
-            <a:avLst>
-              <a:gd name="adj" fmla="val 50000"/>
-            </a:avLst>
-          </a:prstGeom>
-          <a:solidFill>
-            <a:srgbClr val="ECF4F2"/>
-          </a:solidFill>
-          <a:ln>
-            <a:noFill/>
-          </a:ln>
-          <a:effectLst/>
-        </p:spPr>
-        <p:style>
-          <a:lnRef idx="1">
-            <a:schemeClr val="accent1"/>
-          </a:lnRef>
-          <a:fillRef idx="3">
-            <a:schemeClr val="accent1"/>
-          </a:fillRef>
-          <a:effectRef idx="2">
-            <a:schemeClr val="accent1"/>
-          </a:effectRef>
-          <a:fontRef idx="minor">
-            <a:schemeClr val="lt1"/>
-          </a:fontRef>
-        </p:style>
-        <p:txBody>
-          <a:bodyPr rtlCol="0" anchor="ctr" wrap="none" lIns="0" rIns="0" tIns="0" bIns="0"/>
-          <a:lstStyle/>
-          <a:p>
-            <a:pPr algn="ctr"/>
-            <a:r>
-              <a:rPr sz="950" b="1" spc="90">
-                <a:solidFill>
-                  <a:srgbClr val="2C6D5B"/>
-                </a:solidFill>
-                <a:latin typeface="Karla"/>
-              </a:rPr>
-              <a:t>NOW THIS ONE</a:t>
-            </a:r>
-          </a:p>
-        </p:txBody>
-      </p:sp>
-      <p:sp>
-        <p:nvSpPr>
           <p:cNvPr id="4" name="TextBox 3"/>
           <p:cNvSpPr txBox="1"/>
           <p:nvPr/>
@@ -5417,11 +5307,11 @@
               </a:spcAft>
             </a:pPr>
             <a:r>
-              <a:rPr sz="3000" b="1" i="0">
+              <a:rPr sz="3000" b="0" i="0">
                 <a:solidFill>
                   <a:srgbClr val="3C4945"/>
                 </a:solidFill>
-                <a:latin typeface="Libre Caslon Display"/>
+                <a:latin typeface="Georgia"/>
               </a:rPr>
               <a:t>The same conversation again</a:t>
             </a:r>
@@ -5463,7 +5353,7 @@
                 <a:solidFill>
                   <a:srgbClr val="327B68"/>
                 </a:solidFill>
-                <a:latin typeface="Karla"/>
+                <a:latin typeface="Calibri"/>
               </a:rPr>
               <a:t>JAY</a:t>
             </a:r>
@@ -5505,7 +5395,7 @@
                 <a:solidFill>
                   <a:srgbClr val="3C4945"/>
                 </a:solidFill>
-                <a:latin typeface="Karla"/>
+                <a:latin typeface="Calibri"/>
               </a:rPr>
               <a:t>“You have been quiet for a couple of weeks. That is not like you.”</a:t>
             </a:r>
@@ -5547,7 +5437,7 @@
                 <a:solidFill>
                   <a:srgbClr val="327B68"/>
                 </a:solidFill>
-                <a:latin typeface="Karla"/>
+                <a:latin typeface="Calibri"/>
               </a:rPr>
               <a:t>SAM</a:t>
             </a:r>
@@ -5589,7 +5479,7 @@
                 <a:solidFill>
                   <a:srgbClr val="3C4945"/>
                 </a:solidFill>
-                <a:latin typeface="Karla"/>
+                <a:latin typeface="Calibri"/>
               </a:rPr>
               <a:t>“I am fine.”</a:t>
             </a:r>
@@ -5631,7 +5521,7 @@
                 <a:solidFill>
                   <a:srgbClr val="327B68"/>
                 </a:solidFill>
-                <a:latin typeface="Karla"/>
+                <a:latin typeface="Calibri"/>
               </a:rPr>
               <a:t>JAY</a:t>
             </a:r>
@@ -5673,7 +5563,7 @@
                 <a:solidFill>
                   <a:srgbClr val="A1AFAC"/>
                 </a:solidFill>
-                <a:latin typeface="Karla"/>
+                <a:latin typeface="Calibri"/>
               </a:rPr>
               <a:t>(says nothing, and waits)</a:t>
             </a:r>
@@ -5715,7 +5605,7 @@
                 <a:solidFill>
                   <a:srgbClr val="327B68"/>
                 </a:solidFill>
-                <a:latin typeface="Karla"/>
+                <a:latin typeface="Calibri"/>
               </a:rPr>
               <a:t>SAM</a:t>
             </a:r>
@@ -5757,7 +5647,7 @@
                 <a:solidFill>
                   <a:srgbClr val="3C4945"/>
                 </a:solidFill>
-                <a:latin typeface="Karla"/>
+                <a:latin typeface="Calibri"/>
               </a:rPr>
               <a:t>“I have been feeling rubbish, honestly.”</a:t>
             </a:r>
@@ -5799,7 +5689,7 @@
                 <a:solidFill>
                   <a:srgbClr val="327B68"/>
                 </a:solidFill>
-                <a:latin typeface="Karla"/>
+                <a:latin typeface="Calibri"/>
               </a:rPr>
               <a:t>JAY</a:t>
             </a:r>
@@ -5841,7 +5731,7 @@
                 <a:solidFill>
                   <a:srgbClr val="3C4945"/>
                 </a:solidFill>
-                <a:latin typeface="Karla"/>
+                <a:latin typeface="Calibri"/>
               </a:rPr>
               <a:t>“Rubbish how? Is it most days, or some days?”</a:t>
             </a:r>
@@ -5883,7 +5773,7 @@
                 <a:solidFill>
                   <a:srgbClr val="327B68"/>
                 </a:solidFill>
-                <a:latin typeface="Karla"/>
+                <a:latin typeface="Calibri"/>
               </a:rPr>
               <a:t>SAM</a:t>
             </a:r>
@@ -5925,7 +5815,7 @@
                 <a:solidFill>
                   <a:srgbClr val="3C4945"/>
                 </a:solidFill>
-                <a:latin typeface="Karla"/>
+                <a:latin typeface="Calibri"/>
               </a:rPr>
               <a:t>“Most days. Since about the summer.”</a:t>
             </a:r>
@@ -5967,7 +5857,7 @@
                 <a:solidFill>
                   <a:srgbClr val="327B68"/>
                 </a:solidFill>
-                <a:latin typeface="Karla"/>
+                <a:latin typeface="Calibri"/>
               </a:rPr>
               <a:t>JAY</a:t>
             </a:r>
@@ -6009,7 +5899,7 @@
                 <a:solidFill>
                   <a:srgbClr val="3C4945"/>
                 </a:solidFill>
-                <a:latin typeface="Karla"/>
+                <a:latin typeface="Calibri"/>
               </a:rPr>
               <a:t>“Since the summer. That is a long time to carry on your own.”</a:t>
             </a:r>
@@ -6051,7 +5941,7 @@
                 <a:solidFill>
                   <a:srgbClr val="677974"/>
                 </a:solidFill>
-                <a:latin typeface="Karla"/>
+                <a:latin typeface="Calibri"/>
               </a:rPr>
               <a:t>Jay has not given any advice or fixed anything, and Sam still says far more here than in the first version.</a:t>
             </a:r>
@@ -6117,7 +6007,7 @@
                 <a:solidFill>
                   <a:srgbClr val="A1AFAC"/>
                 </a:solidFill>
-                <a:latin typeface="Karla"/>
+                <a:latin typeface="Calibri"/>
               </a:rPr>
               <a:t>The Pastoral Guide</a:t>
             </a:r>
@@ -6159,7 +6049,7 @@
                 <a:solidFill>
                   <a:srgbClr val="A1AFAC"/>
                 </a:solidFill>
-                <a:latin typeface="Karla"/>
+                <a:latin typeface="Calibri"/>
               </a:rPr>
               <a:t>12 / 18</a:t>
             </a:r>
@@ -6230,61 +6120,6 @@
       </p:sp>
       <p:sp>
         <p:nvSpPr>
-          <p:cNvPr id="3" name="Rounded Rectangle 2"/>
-          <p:cNvSpPr/>
-          <p:nvPr/>
-        </p:nvSpPr>
-        <p:spPr>
-          <a:xfrm>
-            <a:off x="685800" y="530352"/>
-            <a:ext cx="1458239" cy="237744"/>
-          </a:xfrm>
-          <a:prstGeom prst="roundRect">
-            <a:avLst>
-              <a:gd name="adj" fmla="val 50000"/>
-            </a:avLst>
-          </a:prstGeom>
-          <a:solidFill>
-            <a:srgbClr val="ECF4F2"/>
-          </a:solidFill>
-          <a:ln>
-            <a:noFill/>
-          </a:ln>
-          <a:effectLst/>
-        </p:spPr>
-        <p:style>
-          <a:lnRef idx="1">
-            <a:schemeClr val="accent1"/>
-          </a:lnRef>
-          <a:fillRef idx="3">
-            <a:schemeClr val="accent1"/>
-          </a:fillRef>
-          <a:effectRef idx="2">
-            <a:schemeClr val="accent1"/>
-          </a:effectRef>
-          <a:fontRef idx="minor">
-            <a:schemeClr val="lt1"/>
-          </a:fontRef>
-        </p:style>
-        <p:txBody>
-          <a:bodyPr rtlCol="0" anchor="ctr" wrap="none" lIns="0" rIns="0" tIns="0" bIns="0"/>
-          <a:lstStyle/>
-          <a:p>
-            <a:pPr algn="ctr"/>
-            <a:r>
-              <a:rPr sz="950" b="1" spc="90">
-                <a:solidFill>
-                  <a:srgbClr val="2C6D5B"/>
-                </a:solidFill>
-                <a:latin typeface="Karla"/>
-              </a:rPr>
-              <a:t>ONE LINE EACH</a:t>
-            </a:r>
-          </a:p>
-        </p:txBody>
-      </p:sp>
-      <p:sp>
-        <p:nvSpPr>
           <p:cNvPr id="4" name="TextBox 3"/>
           <p:cNvSpPr txBox="1"/>
           <p:nvPr/>
@@ -6314,11 +6149,11 @@
               </a:spcAft>
             </a:pPr>
             <a:r>
-              <a:rPr sz="3200" b="1" i="0">
+              <a:rPr sz="3200" b="0" i="0">
                 <a:solidFill>
                   <a:srgbClr val="3C4945"/>
                 </a:solidFill>
-                <a:latin typeface="Libre Caslon Display"/>
+                <a:latin typeface="Georgia"/>
               </a:rPr>
               <a:t>Try one out loud</a:t>
             </a:r>
@@ -6360,7 +6195,7 @@
                 <a:solidFill>
                   <a:srgbClr val="677974"/>
                 </a:solidFill>
-                <a:latin typeface="Karla"/>
+                <a:latin typeface="Calibri"/>
               </a:rPr>
               <a:t>I will read one out. In pairs, agree what you would say next.</a:t>
             </a:r>
@@ -6442,11 +6277,11 @@
               </a:spcAft>
             </a:pPr>
             <a:r>
-              <a:rPr sz="1300" b="1" i="0">
+              <a:rPr sz="1300" b="0" i="0">
                 <a:solidFill>
                   <a:srgbClr val="2C6D5B"/>
                 </a:solidFill>
-                <a:latin typeface="Libre Caslon Display"/>
+                <a:latin typeface="Georgia"/>
               </a:rPr>
               <a:t>“I did not sleep again last night. Third time this week.”</a:t>
             </a:r>
@@ -6488,7 +6323,7 @@
                 <a:solidFill>
                   <a:srgbClr val="677974"/>
                 </a:solidFill>
-                <a:latin typeface="Karla"/>
+                <a:latin typeface="Calibri"/>
               </a:rPr>
               <a:t/>
             </a:r>
@@ -6570,11 +6405,11 @@
               </a:spcAft>
             </a:pPr>
             <a:r>
-              <a:rPr sz="1300" b="1" i="0">
+              <a:rPr sz="1300" b="0" i="0">
                 <a:solidFill>
                   <a:srgbClr val="2C6D5B"/>
                 </a:solidFill>
-                <a:latin typeface="Libre Caslon Display"/>
+                <a:latin typeface="Georgia"/>
               </a:rPr>
               <a:t>“I have stopped going round to my sister’s. Long story.”</a:t>
             </a:r>
@@ -6616,7 +6451,7 @@
                 <a:solidFill>
                   <a:srgbClr val="677974"/>
                 </a:solidFill>
-                <a:latin typeface="Karla"/>
+                <a:latin typeface="Calibri"/>
               </a:rPr>
               <a:t/>
             </a:r>
@@ -6698,11 +6533,11 @@
               </a:spcAft>
             </a:pPr>
             <a:r>
-              <a:rPr sz="1300" b="1" i="0">
+              <a:rPr sz="1300" b="0" i="0">
                 <a:solidFill>
                   <a:srgbClr val="2C6D5B"/>
                 </a:solidFill>
-                <a:latin typeface="Libre Caslon Display"/>
+                <a:latin typeface="Georgia"/>
               </a:rPr>
               <a:t>“I am fine. Just tired. Always tired.”</a:t>
             </a:r>
@@ -6744,7 +6579,7 @@
                 <a:solidFill>
                   <a:srgbClr val="677974"/>
                 </a:solidFill>
-                <a:latin typeface="Karla"/>
+                <a:latin typeface="Calibri"/>
               </a:rPr>
               <a:t/>
             </a:r>
@@ -6786,7 +6621,7 @@
                 <a:solidFill>
                   <a:srgbClr val="677974"/>
                 </a:solidFill>
-                <a:latin typeface="Karla"/>
+                <a:latin typeface="Calibri"/>
               </a:rPr>
               <a:t>Tell me your line, and which of the four moves it uses.</a:t>
             </a:r>
@@ -6852,7 +6687,7 @@
                 <a:solidFill>
                   <a:srgbClr val="A1AFAC"/>
                 </a:solidFill>
-                <a:latin typeface="Karla"/>
+                <a:latin typeface="Calibri"/>
               </a:rPr>
               <a:t>The Pastoral Guide</a:t>
             </a:r>
@@ -6894,7 +6729,7 @@
                 <a:solidFill>
                   <a:srgbClr val="A1AFAC"/>
                 </a:solidFill>
-                <a:latin typeface="Karla"/>
+                <a:latin typeface="Calibri"/>
               </a:rPr>
               <a:t>13 / 18</a:t>
             </a:r>
@@ -7011,7 +6846,7 @@
                 <a:solidFill>
                   <a:srgbClr val="2C6D5B"/>
                 </a:solidFill>
-                <a:latin typeface="Karla"/>
+                <a:latin typeface="Calibri"/>
               </a:rPr>
               <a:t>UP AND ROUND</a:t>
             </a:r>
@@ -7049,11 +6884,11 @@
               </a:spcAft>
             </a:pPr>
             <a:r>
-              <a:rPr sz="3200" b="1" i="0">
+              <a:rPr sz="3200" b="0" i="0">
                 <a:solidFill>
                   <a:srgbClr val="3C4945"/>
                 </a:solidFill>
-                <a:latin typeface="Libre Caslon Display"/>
+                <a:latin typeface="Georgia"/>
               </a:rPr>
               <a:t>The Rewrite</a:t>
             </a:r>
@@ -7095,7 +6930,7 @@
                 <a:solidFill>
                   <a:srgbClr val="677974"/>
                 </a:solidFill>
-                <a:latin typeface="Karla"/>
+                <a:latin typeface="Calibri"/>
               </a:rPr>
               <a:t>Eight cards are up around the room. Every one of them is something somebody really said when a friend opened up.</a:t>
             </a:r>
@@ -7225,7 +7060,7 @@
                 <a:solidFill>
                   <a:srgbClr val="FFFDF7"/>
                 </a:solidFill>
-                <a:latin typeface="Karla"/>
+                <a:latin typeface="Calibri"/>
               </a:rPr>
               <a:t>1</a:t>
             </a:r>
@@ -7263,11 +7098,11 @@
               </a:spcAft>
             </a:pPr>
             <a:r>
-              <a:rPr sz="1300" b="1" i="0">
+              <a:rPr sz="1300" b="0" i="0">
                 <a:solidFill>
                   <a:srgbClr val="2C6D5B"/>
                 </a:solidFill>
-                <a:latin typeface="Libre Caslon Display"/>
+                <a:latin typeface="Georgia"/>
               </a:rPr>
               <a:t>Go to any card with the person next to you.</a:t>
             </a:r>
@@ -7309,7 +7144,7 @@
                 <a:solidFill>
                   <a:srgbClr val="677974"/>
                 </a:solidFill>
-                <a:latin typeface="Karla"/>
+                <a:latin typeface="Calibri"/>
               </a:rPr>
               <a:t>Read it, and work out which of the four moves it misses.</a:t>
             </a:r>
@@ -7439,7 +7274,7 @@
                 <a:solidFill>
                   <a:srgbClr val="FFFDF7"/>
                 </a:solidFill>
-                <a:latin typeface="Karla"/>
+                <a:latin typeface="Calibri"/>
               </a:rPr>
               <a:t>2</a:t>
             </a:r>
@@ -7477,11 +7312,11 @@
               </a:spcAft>
             </a:pPr>
             <a:r>
-              <a:rPr sz="1300" b="1" i="0">
+              <a:rPr sz="1300" b="0" i="0">
                 <a:solidFill>
                   <a:srgbClr val="2C6D5B"/>
                 </a:solidFill>
-                <a:latin typeface="Libre Caslon Display"/>
+                <a:latin typeface="Georgia"/>
               </a:rPr>
               <a:t>Write the better version on a strip and leave it under the card.</a:t>
             </a:r>
@@ -7523,7 +7358,7 @@
                 <a:solidFill>
                   <a:srgbClr val="677974"/>
                 </a:solidFill>
-                <a:latin typeface="Karla"/>
+                <a:latin typeface="Calibri"/>
               </a:rPr>
               <a:t>One sentence. Initials on the back, not the front.</a:t>
             </a:r>
@@ -7653,7 +7488,7 @@
                 <a:solidFill>
                   <a:srgbClr val="FFFDF7"/>
                 </a:solidFill>
-                <a:latin typeface="Karla"/>
+                <a:latin typeface="Calibri"/>
               </a:rPr>
               <a:t>3</a:t>
             </a:r>
@@ -7691,11 +7526,11 @@
               </a:spcAft>
             </a:pPr>
             <a:r>
-              <a:rPr sz="1300" b="1" i="0">
+              <a:rPr sz="1300" b="0" i="0">
                 <a:solidFill>
                   <a:srgbClr val="2C6D5B"/>
                 </a:solidFill>
-                <a:latin typeface="Libre Caslon Display"/>
+                <a:latin typeface="Georgia"/>
               </a:rPr>
               <a:t>Move along when I say, and do four cards in all.</a:t>
             </a:r>
@@ -7737,7 +7572,7 @@
                 <a:solidFill>
                   <a:srgbClr val="677974"/>
                 </a:solidFill>
-                <a:latin typeface="Karla"/>
+                <a:latin typeface="Calibri"/>
               </a:rPr>
               <a:t>Read the strips other people have left while you are there.</a:t>
             </a:r>
@@ -7779,7 +7614,7 @@
                 <a:solidFill>
                   <a:srgbClr val="677974"/>
                 </a:solidFill>
-                <a:latin typeface="Karla"/>
+                <a:latin typeface="Calibri"/>
               </a:rPr>
               <a:t>Nobody is allowed to write “are you okay?” on any of them.</a:t>
             </a:r>
@@ -7845,7 +7680,7 @@
                 <a:solidFill>
                   <a:srgbClr val="A1AFAC"/>
                 </a:solidFill>
-                <a:latin typeface="Karla"/>
+                <a:latin typeface="Calibri"/>
               </a:rPr>
               <a:t>The Pastoral Guide</a:t>
             </a:r>
@@ -7887,7 +7722,7 @@
                 <a:solidFill>
                   <a:srgbClr val="A1AFAC"/>
                 </a:solidFill>
-                <a:latin typeface="Karla"/>
+                <a:latin typeface="Calibri"/>
               </a:rPr>
               <a:t>14 / 18</a:t>
             </a:r>
@@ -7958,61 +7793,6 @@
       </p:sp>
       <p:sp>
         <p:nvSpPr>
-          <p:cNvPr id="3" name="Rounded Rectangle 2"/>
-          <p:cNvSpPr/>
-          <p:nvPr/>
-        </p:nvSpPr>
-        <p:spPr>
-          <a:xfrm>
-            <a:off x="685800" y="530352"/>
-            <a:ext cx="1212545" cy="237744"/>
-          </a:xfrm>
-          <a:prstGeom prst="roundRect">
-            <a:avLst>
-              <a:gd name="adj" fmla="val 50000"/>
-            </a:avLst>
-          </a:prstGeom>
-          <a:solidFill>
-            <a:srgbClr val="ECF4F2"/>
-          </a:solidFill>
-          <a:ln>
-            <a:noFill/>
-          </a:ln>
-          <a:effectLst/>
-        </p:spPr>
-        <p:style>
-          <a:lnRef idx="1">
-            <a:schemeClr val="accent1"/>
-          </a:lnRef>
-          <a:fillRef idx="3">
-            <a:schemeClr val="accent1"/>
-          </a:fillRef>
-          <a:effectRef idx="2">
-            <a:schemeClr val="accent1"/>
-          </a:effectRef>
-          <a:fontRef idx="minor">
-            <a:schemeClr val="lt1"/>
-          </a:fontRef>
-        </p:style>
-        <p:txBody>
-          <a:bodyPr rtlCol="0" anchor="ctr" wrap="none" lIns="0" rIns="0" tIns="0" bIns="0"/>
-          <a:lstStyle/>
-          <a:p>
-            <a:pPr algn="ctr"/>
-            <a:r>
-              <a:rPr sz="950" b="1" spc="90">
-                <a:solidFill>
-                  <a:srgbClr val="2C6D5B"/>
-                </a:solidFill>
-                <a:latin typeface="Karla"/>
-              </a:rPr>
-              <a:t>MARK THEM</a:t>
-            </a:r>
-          </a:p>
-        </p:txBody>
-      </p:sp>
-      <p:sp>
-        <p:nvSpPr>
           <p:cNvPr id="4" name="TextBox 3"/>
           <p:cNvSpPr txBox="1"/>
           <p:nvPr/>
@@ -8042,11 +7822,11 @@
               </a:spcAft>
             </a:pPr>
             <a:r>
-              <a:rPr sz="3000" b="1" i="0">
+              <a:rPr sz="3000" b="0" i="0">
                 <a:solidFill>
                   <a:srgbClr val="3C4945"/>
                 </a:solidFill>
-                <a:latin typeface="Libre Caslon Display"/>
+                <a:latin typeface="Georgia"/>
               </a:rPr>
               <a:t>Back to the card you started on</a:t>
             </a:r>
@@ -8088,7 +7868,7 @@
                 <a:solidFill>
                   <a:srgbClr val="677974"/>
                 </a:solidFill>
-                <a:latin typeface="Karla"/>
+                <a:latin typeface="Calibri"/>
               </a:rPr>
               <a:t>Read every strip underneath it, and tick the ones that do all three of these.</a:t>
             </a:r>
@@ -8238,11 +8018,11 @@
               </a:spcAft>
             </a:pPr>
             <a:r>
-              <a:rPr sz="1350" b="1" i="0">
+              <a:rPr sz="1350" b="0" i="0">
                 <a:solidFill>
                   <a:srgbClr val="2C6D5B"/>
                 </a:solidFill>
-                <a:latin typeface="Libre Caslon Display"/>
+                <a:latin typeface="Georgia"/>
               </a:rPr>
               <a:t>It says what you noticed</a:t>
             </a:r>
@@ -8284,7 +8064,7 @@
                 <a:solidFill>
                   <a:srgbClr val="677974"/>
                 </a:solidFill>
-                <a:latin typeface="Karla"/>
+                <a:latin typeface="Calibri"/>
               </a:rPr>
               <a:t>Something specific, rather than a general question.</a:t>
             </a:r>
@@ -8434,11 +8214,11 @@
               </a:spcAft>
             </a:pPr>
             <a:r>
-              <a:rPr sz="1350" b="1" i="0">
+              <a:rPr sz="1350" b="0" i="0">
                 <a:solidFill>
                   <a:srgbClr val="2C6D5B"/>
                 </a:solidFill>
-                <a:latin typeface="Libre Caslon Display"/>
+                <a:latin typeface="Georgia"/>
               </a:rPr>
               <a:t>It does not fix it</a:t>
             </a:r>
@@ -8480,7 +8260,7 @@
                 <a:solidFill>
                   <a:srgbClr val="677974"/>
                 </a:solidFill>
-                <a:latin typeface="Karla"/>
+                <a:latin typeface="Calibri"/>
               </a:rPr>
               <a:t>No advice, no silver lining, no story about the writer.</a:t>
             </a:r>
@@ -8630,11 +8410,11 @@
               </a:spcAft>
             </a:pPr>
             <a:r>
-              <a:rPr sz="1350" b="1" i="0">
+              <a:rPr sz="1350" b="0" i="0">
                 <a:solidFill>
                   <a:srgbClr val="2C6D5B"/>
                 </a:solidFill>
-                <a:latin typeface="Libre Caslon Display"/>
+                <a:latin typeface="Georgia"/>
               </a:rPr>
               <a:t>It leaves the door open</a:t>
             </a:r>
@@ -8676,7 +8456,7 @@
                 <a:solidFill>
                   <a:srgbClr val="677974"/>
                 </a:solidFill>
-                <a:latin typeface="Karla"/>
+                <a:latin typeface="Calibri"/>
               </a:rPr>
               <a:t>It makes the next conversation easy instead of final.</a:t>
             </a:r>
@@ -8718,7 +8498,7 @@
                 <a:solidFill>
                   <a:srgbClr val="677974"/>
                 </a:solidFill>
-                <a:latin typeface="Karla"/>
+                <a:latin typeface="Calibri"/>
               </a:rPr>
               <a:t>Then read the best one out to the rest of the room.</a:t>
             </a:r>
@@ -8784,7 +8564,7 @@
                 <a:solidFill>
                   <a:srgbClr val="A1AFAC"/>
                 </a:solidFill>
-                <a:latin typeface="Karla"/>
+                <a:latin typeface="Calibri"/>
               </a:rPr>
               <a:t>The Pastoral Guide</a:t>
             </a:r>
@@ -8826,7 +8606,7 @@
                 <a:solidFill>
                   <a:srgbClr val="A1AFAC"/>
                 </a:solidFill>
-                <a:latin typeface="Karla"/>
+                <a:latin typeface="Calibri"/>
               </a:rPr>
               <a:t>15 / 18</a:t>
             </a:r>
@@ -8897,61 +8677,6 @@
       </p:sp>
       <p:sp>
         <p:nvSpPr>
-          <p:cNvPr id="3" name="Rounded Rectangle 2"/>
-          <p:cNvSpPr/>
-          <p:nvPr/>
-        </p:nvSpPr>
-        <p:spPr>
-          <a:xfrm>
-            <a:off x="685800" y="530352"/>
-            <a:ext cx="817727" cy="237744"/>
-          </a:xfrm>
-          <a:prstGeom prst="roundRect">
-            <a:avLst>
-              <a:gd name="adj" fmla="val 50000"/>
-            </a:avLst>
-          </a:prstGeom>
-          <a:solidFill>
-            <a:srgbClr val="ECF4F2"/>
-          </a:solidFill>
-          <a:ln>
-            <a:noFill/>
-          </a:ln>
-          <a:effectLst/>
-        </p:spPr>
-        <p:style>
-          <a:lnRef idx="1">
-            <a:schemeClr val="accent1"/>
-          </a:lnRef>
-          <a:fillRef idx="3">
-            <a:schemeClr val="accent1"/>
-          </a:fillRef>
-          <a:effectRef idx="2">
-            <a:schemeClr val="accent1"/>
-          </a:effectRef>
-          <a:fontRef idx="minor">
-            <a:schemeClr val="lt1"/>
-          </a:fontRef>
-        </p:style>
-        <p:txBody>
-          <a:bodyPr rtlCol="0" anchor="ctr" wrap="none" lIns="0" rIns="0" tIns="0" bIns="0"/>
-          <a:lstStyle/>
-          <a:p>
-            <a:pPr algn="ctr"/>
-            <a:r>
-              <a:rPr sz="950" b="1" spc="90">
-                <a:solidFill>
-                  <a:srgbClr val="2C6D5B"/>
-                </a:solidFill>
-                <a:latin typeface="Karla"/>
-              </a:rPr>
-              <a:t>ARGUE</a:t>
-            </a:r>
-          </a:p>
-        </p:txBody>
-      </p:sp>
-      <p:sp>
-        <p:nvSpPr>
           <p:cNvPr id="4" name="TextBox 3"/>
           <p:cNvSpPr txBox="1"/>
           <p:nvPr/>
@@ -8981,11 +8706,11 @@
               </a:spcAft>
             </a:pPr>
             <a:r>
-              <a:rPr sz="3000" b="1" i="0">
+              <a:rPr sz="3000" b="0" i="0">
                 <a:solidFill>
                   <a:srgbClr val="3C4945"/>
                 </a:solidFill>
-                <a:latin typeface="Libre Caslon Display"/>
+                <a:latin typeface="Georgia"/>
               </a:rPr>
               <a:t>They asked you not to tell anyone</a:t>
             </a:r>
@@ -9027,7 +8752,7 @@
                 <a:solidFill>
                   <a:srgbClr val="677974"/>
                 </a:solidFill>
-                <a:latin typeface="Karla"/>
+                <a:latin typeface="Calibri"/>
               </a:rPr>
               <a:t>There is no clean answer to this one, so take your time over it.</a:t>
             </a:r>
@@ -9109,11 +8834,11 @@
               </a:spcAft>
             </a:pPr>
             <a:r>
-              <a:rPr sz="1300" b="1" i="0">
+              <a:rPr sz="1300" b="0" i="0">
                 <a:solidFill>
                   <a:srgbClr val="2C6D5B"/>
                 </a:solidFill>
-                <a:latin typeface="Libre Caslon Display"/>
+                <a:latin typeface="Georgia"/>
               </a:rPr>
               <a:t>“If I tell someone, they will never trust me again.”</a:t>
             </a:r>
@@ -9155,7 +8880,7 @@
                 <a:solidFill>
                   <a:srgbClr val="677974"/>
                 </a:solidFill>
-                <a:latin typeface="Karla"/>
+                <a:latin typeface="Calibri"/>
               </a:rPr>
               <a:t/>
             </a:r>
@@ -9237,11 +8962,11 @@
               </a:spcAft>
             </a:pPr>
             <a:r>
-              <a:rPr sz="1300" b="1" i="0">
+              <a:rPr sz="1300" b="0" i="0">
                 <a:solidFill>
                   <a:srgbClr val="2C6D5B"/>
                 </a:solidFill>
-                <a:latin typeface="Libre Caslon Display"/>
+                <a:latin typeface="Georgia"/>
               </a:rPr>
               <a:t>“If I say nothing and something happens, that is on me.”</a:t>
             </a:r>
@@ -9283,7 +9008,7 @@
                 <a:solidFill>
                   <a:srgbClr val="677974"/>
                 </a:solidFill>
-                <a:latin typeface="Karla"/>
+                <a:latin typeface="Calibri"/>
               </a:rPr>
               <a:t/>
             </a:r>
@@ -9365,11 +9090,11 @@
               </a:spcAft>
             </a:pPr>
             <a:r>
-              <a:rPr sz="1300" b="1" i="0">
+              <a:rPr sz="1300" b="0" i="0">
                 <a:solidFill>
                   <a:srgbClr val="2C6D5B"/>
                 </a:solidFill>
-                <a:latin typeface="Libre Caslon Display"/>
+                <a:latin typeface="Georgia"/>
               </a:rPr>
               <a:t>“It is their business. It is not mine to hand over.”</a:t>
             </a:r>
@@ -9411,7 +9136,7 @@
                 <a:solidFill>
                   <a:srgbClr val="677974"/>
                 </a:solidFill>
-                <a:latin typeface="Karla"/>
+                <a:latin typeface="Calibri"/>
               </a:rPr>
               <a:t/>
             </a:r>
@@ -9453,7 +9178,7 @@
                 <a:solidFill>
                   <a:srgbClr val="2C6D5B"/>
                 </a:solidFill>
-                <a:latin typeface="Karla"/>
+                <a:latin typeface="Calibri"/>
               </a:rPr>
               <a:t>All three of those are true at once, and move four is the way out of it. You do not decide this on your own.</a:t>
             </a:r>
@@ -9519,7 +9244,7 @@
                 <a:solidFill>
                   <a:srgbClr val="A1AFAC"/>
                 </a:solidFill>
-                <a:latin typeface="Karla"/>
+                <a:latin typeface="Calibri"/>
               </a:rPr>
               <a:t>The Pastoral Guide</a:t>
             </a:r>
@@ -9561,7 +9286,7 @@
                 <a:solidFill>
                   <a:srgbClr val="A1AFAC"/>
                 </a:solidFill>
-                <a:latin typeface="Karla"/>
+                <a:latin typeface="Calibri"/>
               </a:rPr>
               <a:t>16 / 18</a:t>
             </a:r>
@@ -9632,61 +9357,6 @@
       </p:sp>
       <p:sp>
         <p:nvSpPr>
-          <p:cNvPr id="3" name="Rounded Rectangle 2"/>
-          <p:cNvSpPr/>
-          <p:nvPr/>
-        </p:nvSpPr>
-        <p:spPr>
-          <a:xfrm>
-            <a:off x="685800" y="530352"/>
-            <a:ext cx="1402042" cy="237744"/>
-          </a:xfrm>
-          <a:prstGeom prst="roundRect">
-            <a:avLst>
-              <a:gd name="adj" fmla="val 50000"/>
-            </a:avLst>
-          </a:prstGeom>
-          <a:solidFill>
-            <a:srgbClr val="ECF4F2"/>
-          </a:solidFill>
-          <a:ln>
-            <a:noFill/>
-          </a:ln>
-          <a:effectLst/>
-        </p:spPr>
-        <p:style>
-          <a:lnRef idx="1">
-            <a:schemeClr val="accent1"/>
-          </a:lnRef>
-          <a:fillRef idx="3">
-            <a:schemeClr val="accent1"/>
-          </a:fillRef>
-          <a:effectRef idx="2">
-            <a:schemeClr val="accent1"/>
-          </a:effectRef>
-          <a:fontRef idx="minor">
-            <a:schemeClr val="lt1"/>
-          </a:fontRef>
-        </p:style>
-        <p:txBody>
-          <a:bodyPr rtlCol="0" anchor="ctr" wrap="none" lIns="0" rIns="0" tIns="0" bIns="0"/>
-          <a:lstStyle/>
-          <a:p>
-            <a:pPr algn="ctr"/>
-            <a:r>
-              <a:rPr sz="950" b="1" spc="90">
-                <a:solidFill>
-                  <a:srgbClr val="2C6D5B"/>
-                </a:solidFill>
-                <a:latin typeface="Karla"/>
-              </a:rPr>
-              <a:t>ON YOUR OWN</a:t>
-            </a:r>
-          </a:p>
-        </p:txBody>
-      </p:sp>
-      <p:sp>
-        <p:nvSpPr>
           <p:cNvPr id="4" name="TextBox 3"/>
           <p:cNvSpPr txBox="1"/>
           <p:nvPr/>
@@ -9716,11 +9386,11 @@
               </a:spcAft>
             </a:pPr>
             <a:r>
-              <a:rPr sz="3000" b="1" i="0">
+              <a:rPr sz="3000" b="0" i="0">
                 <a:solidFill>
                   <a:srgbClr val="3C4945"/>
                 </a:solidFill>
-                <a:latin typeface="Libre Caslon Display"/>
+                <a:latin typeface="Georgia"/>
               </a:rPr>
               <a:t>Two names, and nobody reads it</a:t>
             </a:r>
@@ -9762,7 +9432,7 @@
                 <a:solidFill>
                   <a:srgbClr val="677974"/>
                 </a:solidFill>
-                <a:latin typeface="Karla"/>
+                <a:latin typeface="Calibri"/>
               </a:rPr>
               <a:t>This one is not collected, not marked and not read out. Write it, fold it and take it with you.</a:t>
             </a:r>
@@ -9892,7 +9562,7 @@
                 <a:solidFill>
                   <a:srgbClr val="FFFDF7"/>
                 </a:solidFill>
-                <a:latin typeface="Karla"/>
+                <a:latin typeface="Calibri"/>
               </a:rPr>
               <a:t>1</a:t>
             </a:r>
@@ -9930,11 +9600,11 @@
               </a:spcAft>
             </a:pPr>
             <a:r>
-              <a:rPr sz="1300" b="1" i="0">
+              <a:rPr sz="1300" b="0" i="0">
                 <a:solidFill>
                   <a:srgbClr val="2C6D5B"/>
                 </a:solidFill>
-                <a:latin typeface="Libre Caslon Display"/>
+                <a:latin typeface="Georgia"/>
               </a:rPr>
               <a:t>One person you would go to.</a:t>
             </a:r>
@@ -9976,7 +9646,7 @@
                 <a:solidFill>
                   <a:srgbClr val="677974"/>
                 </a:solidFill>
-                <a:latin typeface="Karla"/>
+                <a:latin typeface="Calibri"/>
               </a:rPr>
               <a:t>It does not have to be a teacher, and it does not have to be family.</a:t>
             </a:r>
@@ -10106,7 +9776,7 @@
                 <a:solidFill>
                   <a:srgbClr val="FFFDF7"/>
                 </a:solidFill>
-                <a:latin typeface="Karla"/>
+                <a:latin typeface="Calibri"/>
               </a:rPr>
               <a:t>2</a:t>
             </a:r>
@@ -10144,11 +9814,11 @@
               </a:spcAft>
             </a:pPr>
             <a:r>
-              <a:rPr sz="1300" b="1" i="0">
+              <a:rPr sz="1300" b="0" i="0">
                 <a:solidFill>
                   <a:srgbClr val="2C6D5B"/>
                 </a:solidFill>
-                <a:latin typeface="Libre Caslon Display"/>
+                <a:latin typeface="Georgia"/>
               </a:rPr>
               <a:t>One person who might come to you.</a:t>
             </a:r>
@@ -10190,7 +9860,7 @@
                 <a:solidFill>
                   <a:srgbClr val="677974"/>
                 </a:solidFill>
-                <a:latin typeface="Karla"/>
+                <a:latin typeface="Calibri"/>
               </a:rPr>
               <a:t>You do not have to do anything about it. Just notice that somebody came to mind.</a:t>
             </a:r>
@@ -10232,7 +9902,7 @@
                 <a:solidFill>
                   <a:srgbClr val="677974"/>
                 </a:solidFill>
-                <a:latin typeface="Karla"/>
+                <a:latin typeface="Calibri"/>
               </a:rPr>
               <a:t>If you could not think of anybody for the first one, come and find me today.</a:t>
             </a:r>
@@ -10298,7 +9968,7 @@
                 <a:solidFill>
                   <a:srgbClr val="A1AFAC"/>
                 </a:solidFill>
-                <a:latin typeface="Karla"/>
+                <a:latin typeface="Calibri"/>
               </a:rPr>
               <a:t>The Pastoral Guide</a:t>
             </a:r>
@@ -10340,7 +10010,7 @@
                 <a:solidFill>
                   <a:srgbClr val="A1AFAC"/>
                 </a:solidFill>
-                <a:latin typeface="Karla"/>
+                <a:latin typeface="Calibri"/>
               </a:rPr>
               <a:t>17 / 18</a:t>
             </a:r>
@@ -10464,11 +10134,11 @@
               </a:spcAft>
             </a:pPr>
             <a:r>
-              <a:rPr sz="3200" b="1" i="0">
+              <a:rPr sz="3200" b="0" i="0">
                 <a:solidFill>
                   <a:srgbClr val="2C6D5B"/>
                 </a:solidFill>
-                <a:latin typeface="Libre Caslon Display"/>
+                <a:latin typeface="Georgia"/>
               </a:rPr>
               <a:t>You are not meant to fix it.</a:t>
             </a:r>
@@ -10510,7 +10180,7 @@
                 <a:solidFill>
                   <a:srgbClr val="677974"/>
                 </a:solidFill>
-                <a:latin typeface="Karla"/>
+                <a:latin typeface="Calibri"/>
               </a:rPr>
               <a:t>Notice, ask a second time, and do not disappear afterwards. You have just spent an hour on those three, and none of them are complicated.</a:t>
             </a:r>
@@ -10552,7 +10222,7 @@
                 <a:solidFill>
                   <a:srgbClr val="A1AFAC"/>
                 </a:solidFill>
-                <a:latin typeface="Karla"/>
+                <a:latin typeface="Calibri"/>
               </a:rPr>
               <a:t>World Mental Health Day  ·  When a Friend Tells You They Are Struggling</a:t>
             </a:r>
@@ -10618,7 +10288,7 @@
                 <a:solidFill>
                   <a:srgbClr val="A1AFAC"/>
                 </a:solidFill>
-                <a:latin typeface="Karla"/>
+                <a:latin typeface="Calibri"/>
               </a:rPr>
               <a:t>The Pastoral Guide</a:t>
             </a:r>
@@ -10660,7 +10330,7 @@
                 <a:solidFill>
                   <a:srgbClr val="A1AFAC"/>
                 </a:solidFill>
-                <a:latin typeface="Karla"/>
+                <a:latin typeface="Calibri"/>
               </a:rPr>
               <a:t>18 / 18</a:t>
             </a:r>
@@ -10777,7 +10447,7 @@
                 <a:solidFill>
                   <a:srgbClr val="2C6D5B"/>
                 </a:solidFill>
-                <a:latin typeface="Karla"/>
+                <a:latin typeface="Calibri"/>
               </a:rPr>
               <a:t>TEACHER SLIDE  ·  SKIP IT</a:t>
             </a:r>
@@ -10815,11 +10485,11 @@
               </a:spcAft>
             </a:pPr>
             <a:r>
-              <a:rPr sz="3000" b="1" i="0">
+              <a:rPr sz="3000" b="0" i="0">
                 <a:solidFill>
                   <a:srgbClr val="3C4945"/>
                 </a:solidFill>
-                <a:latin typeface="Libre Caslon Display"/>
+                <a:latin typeface="Georgia"/>
               </a:rPr>
               <a:t>Before they come in</a:t>
             </a:r>
@@ -10949,7 +10619,7 @@
                 <a:solidFill>
                   <a:srgbClr val="FFFDF7"/>
                 </a:solidFill>
-                <a:latin typeface="Karla"/>
+                <a:latin typeface="Calibri"/>
               </a:rPr>
               <a:t>1</a:t>
             </a:r>
@@ -10987,11 +10657,11 @@
               </a:spcAft>
             </a:pPr>
             <a:r>
-              <a:rPr sz="1300" b="1" i="0">
+              <a:rPr sz="1300" b="0" i="0">
                 <a:solidFill>
                   <a:srgbClr val="2C6D5B"/>
                 </a:solidFill>
-                <a:latin typeface="Libre Caslon Display"/>
+                <a:latin typeface="Georgia"/>
               </a:rPr>
               <a:t>Eight response cards, one set per table.</a:t>
             </a:r>
@@ -11033,7 +10703,7 @@
                 <a:solidFill>
                   <a:srgbClr val="677974"/>
                 </a:solidFill>
-                <a:latin typeface="Karla"/>
+                <a:latin typeface="Calibri"/>
               </a:rPr>
               <a:t>Page 8 of the pack. Cut them up once and they last for years.</a:t>
             </a:r>
@@ -11163,7 +10833,7 @@
                 <a:solidFill>
                   <a:srgbClr val="FFFDF7"/>
                 </a:solidFill>
-                <a:latin typeface="Karla"/>
+                <a:latin typeface="Calibri"/>
               </a:rPr>
               <a:t>2</a:t>
             </a:r>
@@ -11201,11 +10871,11 @@
               </a:spcAft>
             </a:pPr>
             <a:r>
-              <a:rPr sz="1300" b="1" i="0">
+              <a:rPr sz="1300" b="0" i="0">
                 <a:solidFill>
                   <a:srgbClr val="2C6D5B"/>
                 </a:solidFill>
-                <a:latin typeface="Libre Caslon Display"/>
+                <a:latin typeface="Georgia"/>
               </a:rPr>
               <a:t>Eight station cards, up on the walls.</a:t>
             </a:r>
@@ -11247,7 +10917,7 @@
                 <a:solidFill>
                   <a:srgbClr val="677974"/>
                 </a:solidFill>
-                <a:latin typeface="Karla"/>
+                <a:latin typeface="Calibri"/>
               </a:rPr>
               <a:t>Page 9. Spread them round the room so pairs do not bunch up at one card.</a:t>
             </a:r>
@@ -11377,7 +11047,7 @@
                 <a:solidFill>
                   <a:srgbClr val="FFFDF7"/>
                 </a:solidFill>
-                <a:latin typeface="Karla"/>
+                <a:latin typeface="Calibri"/>
               </a:rPr>
               <a:t>3</a:t>
             </a:r>
@@ -11415,11 +11085,11 @@
               </a:spcAft>
             </a:pPr>
             <a:r>
-              <a:rPr sz="1300" b="1" i="0">
+              <a:rPr sz="1300" b="0" i="0">
                 <a:solidFill>
                   <a:srgbClr val="2C6D5B"/>
                 </a:solidFill>
-                <a:latin typeface="Libre Caslon Display"/>
+                <a:latin typeface="Georgia"/>
               </a:rPr>
               <a:t>A pile of rewrite strips beside each card.</a:t>
             </a:r>
@@ -11461,7 +11131,7 @@
                 <a:solidFill>
                   <a:srgbClr val="677974"/>
                 </a:solidFill>
-                <a:latin typeface="Karla"/>
+                <a:latin typeface="Calibri"/>
               </a:rPr>
               <a:t>Page 10, cut into strips. About six per station is plenty.</a:t>
             </a:r>
@@ -11503,7 +11173,7 @@
                 <a:solidFill>
                   <a:srgbClr val="677974"/>
                 </a:solidFill>
-                <a:latin typeface="Karla"/>
+                <a:latin typeface="Calibri"/>
               </a:rPr>
               <a:t>Tell your safeguarding lead the lesson is running. Students do come and talk to you after this one.</a:t>
             </a:r>
@@ -11569,7 +11239,7 @@
                 <a:solidFill>
                   <a:srgbClr val="A1AFAC"/>
                 </a:solidFill>
-                <a:latin typeface="Karla"/>
+                <a:latin typeface="Calibri"/>
               </a:rPr>
               <a:t>The Pastoral Guide</a:t>
             </a:r>
@@ -11611,7 +11281,7 @@
                 <a:solidFill>
                   <a:srgbClr val="A1AFAC"/>
                 </a:solidFill>
-                <a:latin typeface="Karla"/>
+                <a:latin typeface="Calibri"/>
               </a:rPr>
               <a:t>2 / 18</a:t>
             </a:r>
@@ -11682,61 +11352,6 @@
       </p:sp>
       <p:sp>
         <p:nvSpPr>
-          <p:cNvPr id="3" name="Rounded Rectangle 2"/>
-          <p:cNvSpPr/>
-          <p:nvPr/>
-        </p:nvSpPr>
-        <p:spPr>
-          <a:xfrm>
-            <a:off x="685800" y="530352"/>
-            <a:ext cx="1171965" cy="237744"/>
-          </a:xfrm>
-          <a:prstGeom prst="roundRect">
-            <a:avLst>
-              <a:gd name="adj" fmla="val 50000"/>
-            </a:avLst>
-          </a:prstGeom>
-          <a:solidFill>
-            <a:srgbClr val="ECF4F2"/>
-          </a:solidFill>
-          <a:ln>
-            <a:noFill/>
-          </a:ln>
-          <a:effectLst/>
-        </p:spPr>
-        <p:style>
-          <a:lnRef idx="1">
-            <a:schemeClr val="accent1"/>
-          </a:lnRef>
-          <a:fillRef idx="3">
-            <a:schemeClr val="accent1"/>
-          </a:fillRef>
-          <a:effectRef idx="2">
-            <a:schemeClr val="accent1"/>
-          </a:effectRef>
-          <a:fontRef idx="minor">
-            <a:schemeClr val="lt1"/>
-          </a:fontRef>
-        </p:style>
-        <p:txBody>
-          <a:bodyPr rtlCol="0" anchor="ctr" wrap="none" lIns="0" rIns="0" tIns="0" bIns="0"/>
-          <a:lstStyle/>
-          <a:p>
-            <a:pPr algn="ctr"/>
-            <a:r>
-              <a:rPr sz="950" b="1" spc="90">
-                <a:solidFill>
-                  <a:srgbClr val="2C6D5B"/>
-                </a:solidFill>
-                <a:latin typeface="Karla"/>
-              </a:rPr>
-              <a:t>SORT THEM</a:t>
-            </a:r>
-          </a:p>
-        </p:txBody>
-      </p:sp>
-      <p:sp>
-        <p:nvSpPr>
           <p:cNvPr id="4" name="TextBox 3"/>
           <p:cNvSpPr txBox="1"/>
           <p:nvPr/>
@@ -11766,11 +11381,11 @@
               </a:spcAft>
             </a:pPr>
             <a:r>
-              <a:rPr sz="3000" b="1" i="0">
+              <a:rPr sz="3000" b="0" i="0">
                 <a:solidFill>
                   <a:srgbClr val="3C4945"/>
                 </a:solidFill>
-                <a:latin typeface="Libre Caslon Display"/>
+                <a:latin typeface="Georgia"/>
               </a:rPr>
               <a:t>Eight things people actually say</a:t>
             </a:r>
@@ -11812,7 +11427,7 @@
                 <a:solidFill>
                   <a:srgbClr val="677974"/>
                 </a:solidFill>
-                <a:latin typeface="Karla"/>
+                <a:latin typeface="Calibri"/>
               </a:rPr>
               <a:t>There are eight cards on your table. Somebody has just told a friend that they are struggling, and these are the replies they got.</a:t>
             </a:r>
@@ -11894,11 +11509,11 @@
               </a:spcAft>
             </a:pPr>
             <a:r>
-              <a:rPr sz="1300" b="1" i="0">
+              <a:rPr sz="1300" b="0" i="0">
                 <a:solidFill>
                   <a:srgbClr val="2C6D5B"/>
                 </a:solidFill>
-                <a:latin typeface="Libre Caslon Display"/>
+                <a:latin typeface="Georgia"/>
               </a:rPr>
               <a:t>Helped</a:t>
             </a:r>
@@ -11940,7 +11555,7 @@
                 <a:solidFill>
                   <a:srgbClr val="677974"/>
                 </a:solidFill>
-                <a:latin typeface="Karla"/>
+                <a:latin typeface="Calibri"/>
               </a:rPr>
               <a:t>You would be glad somebody said this to you.</a:t>
             </a:r>
@@ -12022,11 +11637,11 @@
               </a:spcAft>
             </a:pPr>
             <a:r>
-              <a:rPr sz="1300" b="1" i="0">
+              <a:rPr sz="1300" b="0" i="0">
                 <a:solidFill>
                   <a:srgbClr val="2C6D5B"/>
                 </a:solidFill>
-                <a:latin typeface="Libre Caslon Display"/>
+                <a:latin typeface="Georgia"/>
               </a:rPr>
               <a:t>Did not help</a:t>
             </a:r>
@@ -12068,7 +11683,7 @@
                 <a:solidFill>
                   <a:srgbClr val="677974"/>
                 </a:solidFill>
-                <a:latin typeface="Karla"/>
+                <a:latin typeface="Calibri"/>
               </a:rPr>
               <a:t>Nothing cruel about it. It just ended the conversation.</a:t>
             </a:r>
@@ -12150,11 +11765,11 @@
               </a:spcAft>
             </a:pPr>
             <a:r>
-              <a:rPr sz="1300" b="1" i="0">
+              <a:rPr sz="1300" b="0" i="0">
                 <a:solidFill>
                   <a:srgbClr val="2C6D5B"/>
                 </a:solidFill>
-                <a:latin typeface="Libre Caslon Display"/>
+                <a:latin typeface="Georgia"/>
               </a:rPr>
               <a:t>It depends</a:t>
             </a:r>
@@ -12196,7 +11811,7 @@
                 <a:solidFill>
                   <a:srgbClr val="677974"/>
                 </a:solidFill>
-                <a:latin typeface="Karla"/>
+                <a:latin typeface="Calibri"/>
               </a:rPr>
               <a:t>It could go either way, and you have to say what it depends on.</a:t>
             </a:r>
@@ -12238,7 +11853,7 @@
                 <a:solidFill>
                   <a:srgbClr val="677974"/>
                 </a:solidFill>
-                <a:latin typeface="Karla"/>
+                <a:latin typeface="Calibri"/>
               </a:rPr>
               <a:t>This hour is about what you say to somebody else, not about your own week.</a:t>
             </a:r>
@@ -12304,7 +11919,7 @@
                 <a:solidFill>
                   <a:srgbClr val="A1AFAC"/>
                 </a:solidFill>
-                <a:latin typeface="Karla"/>
+                <a:latin typeface="Calibri"/>
               </a:rPr>
               <a:t>The Pastoral Guide</a:t>
             </a:r>
@@ -12346,7 +11961,7 @@
                 <a:solidFill>
                   <a:srgbClr val="A1AFAC"/>
                 </a:solidFill>
-                <a:latin typeface="Karla"/>
+                <a:latin typeface="Calibri"/>
               </a:rPr>
               <a:t>3 / 18</a:t>
             </a:r>
@@ -12417,61 +12032,6 @@
       </p:sp>
       <p:sp>
         <p:nvSpPr>
-          <p:cNvPr id="3" name="Rounded Rectangle 2"/>
-          <p:cNvSpPr/>
-          <p:nvPr/>
-        </p:nvSpPr>
-        <p:spPr>
-          <a:xfrm>
-            <a:off x="685800" y="530352"/>
-            <a:ext cx="1809258" cy="237744"/>
-          </a:xfrm>
-          <a:prstGeom prst="roundRect">
-            <a:avLst>
-              <a:gd name="adj" fmla="val 50000"/>
-            </a:avLst>
-          </a:prstGeom>
-          <a:solidFill>
-            <a:srgbClr val="ECF4F2"/>
-          </a:solidFill>
-          <a:ln>
-            <a:noFill/>
-          </a:ln>
-          <a:effectLst/>
-        </p:spPr>
-        <p:style>
-          <a:lnRef idx="1">
-            <a:schemeClr val="accent1"/>
-          </a:lnRef>
-          <a:fillRef idx="3">
-            <a:schemeClr val="accent1"/>
-          </a:fillRef>
-          <a:effectRef idx="2">
-            <a:schemeClr val="accent1"/>
-          </a:effectRef>
-          <a:fontRef idx="minor">
-            <a:schemeClr val="lt1"/>
-          </a:fontRef>
-        </p:style>
-        <p:txBody>
-          <a:bodyPr rtlCol="0" anchor="ctr" wrap="none" lIns="0" rIns="0" tIns="0" bIns="0"/>
-          <a:lstStyle/>
-          <a:p>
-            <a:pPr algn="ctr"/>
-            <a:r>
-              <a:rPr sz="950" b="1" spc="90">
-                <a:solidFill>
-                  <a:srgbClr val="2C6D5B"/>
-                </a:solidFill>
-                <a:latin typeface="Karla"/>
-              </a:rPr>
-              <a:t>WHAT YOU DECIDED</a:t>
-            </a:r>
-          </a:p>
-        </p:txBody>
-      </p:sp>
-      <p:sp>
-        <p:nvSpPr>
           <p:cNvPr id="4" name="TextBox 3"/>
           <p:cNvSpPr txBox="1"/>
           <p:nvPr/>
@@ -12501,11 +12061,11 @@
               </a:spcAft>
             </a:pPr>
             <a:r>
-              <a:rPr sz="3000" b="1" i="0">
+              <a:rPr sz="3000" b="0" i="0">
                 <a:solidFill>
                   <a:srgbClr val="3C4945"/>
                 </a:solidFill>
-                <a:latin typeface="Libre Caslon Display"/>
+                <a:latin typeface="Georgia"/>
               </a:rPr>
               <a:t>The pile that starts the argument</a:t>
             </a:r>
@@ -12547,7 +12107,7 @@
                 <a:solidFill>
                   <a:srgbClr val="677974"/>
                 </a:solidFill>
-                <a:latin typeface="Karla"/>
+                <a:latin typeface="Calibri"/>
               </a:rPr>
               <a:t>Most classes agree the top three and bottom two quickly. The middle pile takes the time.</a:t>
             </a:r>
@@ -12629,11 +12189,11 @@
               </a:spcAft>
             </a:pPr>
             <a:r>
-              <a:rPr sz="1300" b="1" i="0">
+              <a:rPr sz="1300" b="0" i="0">
                 <a:solidFill>
                   <a:srgbClr val="2C6D5B"/>
                 </a:solidFill>
-                <a:latin typeface="Libre Caslon Display"/>
+                <a:latin typeface="Georgia"/>
               </a:rPr>
               <a:t>“You should tell someone.”</a:t>
             </a:r>
@@ -12675,7 +12235,7 @@
                 <a:solidFill>
                   <a:srgbClr val="677974"/>
                 </a:solidFill>
-                <a:latin typeface="Karla"/>
+                <a:latin typeface="Calibri"/>
               </a:rPr>
               <a:t>True, but it does nothing on its own. It puts the whole thing back on them.</a:t>
             </a:r>
@@ -12757,11 +12317,11 @@
               </a:spcAft>
             </a:pPr>
             <a:r>
-              <a:rPr sz="1300" b="1" i="0">
+              <a:rPr sz="1300" b="0" i="0">
                 <a:solidFill>
                   <a:srgbClr val="2C6D5B"/>
                 </a:solidFill>
-                <a:latin typeface="Libre Caslon Display"/>
+                <a:latin typeface="Georgia"/>
               </a:rPr>
               <a:t>“Same though. I get like that too.”</a:t>
             </a:r>
@@ -12803,7 +12363,7 @@
                 <a:solidFill>
                   <a:srgbClr val="677974"/>
                 </a:solidFill>
-                <a:latin typeface="Karla"/>
+                <a:latin typeface="Calibri"/>
               </a:rPr>
               <a:t>It can make somebody feel less odd. It can also turn the conversation round to you.</a:t>
             </a:r>
@@ -12885,11 +12445,11 @@
               </a:spcAft>
             </a:pPr>
             <a:r>
-              <a:rPr sz="1300" b="1" i="0">
+              <a:rPr sz="1300" b="0" i="0">
                 <a:solidFill>
                   <a:srgbClr val="2C6D5B"/>
                 </a:solidFill>
-                <a:latin typeface="Libre Caslon Display"/>
+                <a:latin typeface="Georgia"/>
               </a:rPr>
               <a:t>“Are you okay?”</a:t>
             </a:r>
@@ -12931,7 +12491,7 @@
                 <a:solidFill>
                   <a:srgbClr val="677974"/>
                 </a:solidFill>
-                <a:latin typeface="Karla"/>
+                <a:latin typeface="Calibri"/>
               </a:rPr>
               <a:t>The most common thing anybody says, and the easiest to answer with a lie.</a:t>
             </a:r>
@@ -12973,7 +12533,7 @@
                 <a:solidFill>
                   <a:srgbClr val="677974"/>
                 </a:solidFill>
-                <a:latin typeface="Karla"/>
+                <a:latin typeface="Calibri"/>
               </a:rPr>
               <a:t>None of these is cruel. They just do not get you very far.</a:t>
             </a:r>
@@ -13039,7 +12599,7 @@
                 <a:solidFill>
                   <a:srgbClr val="A1AFAC"/>
                 </a:solidFill>
-                <a:latin typeface="Karla"/>
+                <a:latin typeface="Calibri"/>
               </a:rPr>
               <a:t>The Pastoral Guide</a:t>
             </a:r>
@@ -13081,7 +12641,7 @@
                 <a:solidFill>
                   <a:srgbClr val="A1AFAC"/>
                 </a:solidFill>
-                <a:latin typeface="Karla"/>
+                <a:latin typeface="Calibri"/>
               </a:rPr>
               <a:t>4 / 18</a:t>
             </a:r>
@@ -13181,11 +12741,11 @@
               </a:spcAft>
             </a:pPr>
             <a:r>
-              <a:rPr sz="2800" b="1" i="0">
+              <a:rPr sz="2800" b="0" i="0">
                 <a:solidFill>
                   <a:srgbClr val="FFFDF7"/>
                 </a:solidFill>
-                <a:latin typeface="Libre Caslon Display"/>
+                <a:latin typeface="Georgia"/>
               </a:rPr>
               <a:t>Somebody has told you something,</a:t>
             </a:r>
@@ -13203,11 +12763,11 @@
               </a:spcAft>
             </a:pPr>
             <a:r>
-              <a:rPr sz="2800" b="1" i="0">
+              <a:rPr sz="2800" b="0" i="0">
                 <a:solidFill>
                   <a:srgbClr val="FFFDF7"/>
                 </a:solidFill>
-                <a:latin typeface="Libre Caslon Display"/>
+                <a:latin typeface="Georgia"/>
               </a:rPr>
               <a:t>and you have no idea what to say next.</a:t>
             </a:r>
@@ -13293,7 +12853,7 @@
                 <a:solidFill>
                   <a:srgbClr val="BEDAD3"/>
                 </a:solidFill>
-                <a:latin typeface="Karla"/>
+                <a:latin typeface="Calibri"/>
               </a:rPr>
               <a:t>So you say the first thing that comes out, and then you think about it for the rest of the day. Almost everybody does that, and it is why we are doing this.</a:t>
             </a:r>
@@ -13359,7 +12919,7 @@
                 <a:solidFill>
                   <a:srgbClr val="BEDAD3"/>
                 </a:solidFill>
-                <a:latin typeface="Karla"/>
+                <a:latin typeface="Calibri"/>
               </a:rPr>
               <a:t>The Pastoral Guide</a:t>
             </a:r>
@@ -13401,7 +12961,7 @@
                 <a:solidFill>
                   <a:srgbClr val="BEDAD3"/>
                 </a:solidFill>
-                <a:latin typeface="Karla"/>
+                <a:latin typeface="Calibri"/>
               </a:rPr>
               <a:t>5 / 18</a:t>
             </a:r>
@@ -13472,61 +13032,6 @@
       </p:sp>
       <p:sp>
         <p:nvSpPr>
-          <p:cNvPr id="3" name="Rounded Rectangle 2"/>
-          <p:cNvSpPr/>
-          <p:nvPr/>
-        </p:nvSpPr>
-        <p:spPr>
-          <a:xfrm>
-            <a:off x="685800" y="530352"/>
-            <a:ext cx="798577" cy="237744"/>
-          </a:xfrm>
-          <a:prstGeom prst="roundRect">
-            <a:avLst>
-              <a:gd name="adj" fmla="val 50000"/>
-            </a:avLst>
-          </a:prstGeom>
-          <a:solidFill>
-            <a:srgbClr val="ECF4F2"/>
-          </a:solidFill>
-          <a:ln>
-            <a:noFill/>
-          </a:ln>
-          <a:effectLst/>
-        </p:spPr>
-        <p:style>
-          <a:lnRef idx="1">
-            <a:schemeClr val="accent1"/>
-          </a:lnRef>
-          <a:fillRef idx="3">
-            <a:schemeClr val="accent1"/>
-          </a:fillRef>
-          <a:effectRef idx="2">
-            <a:schemeClr val="accent1"/>
-          </a:effectRef>
-          <a:fontRef idx="minor">
-            <a:schemeClr val="lt1"/>
-          </a:fontRef>
-        </p:style>
-        <p:txBody>
-          <a:bodyPr rtlCol="0" anchor="ctr" wrap="none" lIns="0" rIns="0" tIns="0" bIns="0"/>
-          <a:lstStyle/>
-          <a:p>
-            <a:pPr algn="ctr"/>
-            <a:r>
-              <a:rPr sz="950" b="1" spc="90">
-                <a:solidFill>
-                  <a:srgbClr val="2C6D5B"/>
-                </a:solidFill>
-                <a:latin typeface="Karla"/>
-              </a:rPr>
-              <a:t>LEARN</a:t>
-            </a:r>
-          </a:p>
-        </p:txBody>
-      </p:sp>
-      <p:sp>
-        <p:nvSpPr>
           <p:cNvPr id="4" name="TextBox 3"/>
           <p:cNvSpPr txBox="1"/>
           <p:nvPr/>
@@ -13556,11 +13061,11 @@
               </a:spcAft>
             </a:pPr>
             <a:r>
-              <a:rPr sz="3200" b="1" i="0">
+              <a:rPr sz="3200" b="0" i="0">
                 <a:solidFill>
                   <a:srgbClr val="3C4945"/>
                 </a:solidFill>
-                <a:latin typeface="Libre Caslon Display"/>
+                <a:latin typeface="Georgia"/>
               </a:rPr>
               <a:t>The four moves</a:t>
             </a:r>
@@ -13710,11 +13215,11 @@
               </a:spcAft>
             </a:pPr>
             <a:r>
-              <a:rPr sz="1400" b="1" i="0">
+              <a:rPr sz="1400" b="0" i="0">
                 <a:solidFill>
                   <a:srgbClr val="2C6D5B"/>
                 </a:solidFill>
-                <a:latin typeface="Libre Caslon Display"/>
+                <a:latin typeface="Georgia"/>
               </a:rPr>
               <a:t>Notice</a:t>
             </a:r>
@@ -13756,7 +13261,7 @@
                 <a:solidFill>
                   <a:srgbClr val="677974"/>
                 </a:solidFill>
-                <a:latin typeface="Karla"/>
+                <a:latin typeface="Calibri"/>
               </a:rPr>
               <a:t>Say what you have actually seen, not a general question.</a:t>
             </a:r>
@@ -13906,11 +13411,11 @@
               </a:spcAft>
             </a:pPr>
             <a:r>
-              <a:rPr sz="1400" b="1" i="0">
+              <a:rPr sz="1400" b="0" i="0">
                 <a:solidFill>
                   <a:srgbClr val="2C6D5B"/>
                 </a:solidFill>
-                <a:latin typeface="Libre Caslon Display"/>
+                <a:latin typeface="Georgia"/>
               </a:rPr>
               <a:t>Ask twice</a:t>
             </a:r>
@@ -13952,7 +13457,7 @@
                 <a:solidFill>
                   <a:srgbClr val="677974"/>
                 </a:solidFill>
-                <a:latin typeface="Karla"/>
+                <a:latin typeface="Calibri"/>
               </a:rPr>
               <a:t>The first answer is nearly always the polite one. Go back once.</a:t>
             </a:r>
@@ -14102,11 +13607,11 @@
               </a:spcAft>
             </a:pPr>
             <a:r>
-              <a:rPr sz="1400" b="1" i="0">
+              <a:rPr sz="1400" b="0" i="0">
                 <a:solidFill>
                   <a:srgbClr val="2C6D5B"/>
                 </a:solidFill>
-                <a:latin typeface="Libre Caslon Display"/>
+                <a:latin typeface="Georgia"/>
               </a:rPr>
               <a:t>Listen</a:t>
             </a:r>
@@ -14148,7 +13653,7 @@
                 <a:solidFill>
                   <a:srgbClr val="677974"/>
                 </a:solidFill>
-                <a:latin typeface="Karla"/>
+                <a:latin typeface="Calibri"/>
               </a:rPr>
               <a:t>Say it back to them instead of trying to solve it.</a:t>
             </a:r>
@@ -14298,11 +13803,11 @@
               </a:spcAft>
             </a:pPr>
             <a:r>
-              <a:rPr sz="1400" b="1" i="0">
+              <a:rPr sz="1400" b="0" i="0">
                 <a:solidFill>
                   <a:srgbClr val="2C6D5B"/>
                 </a:solidFill>
-                <a:latin typeface="Libre Caslon Display"/>
+                <a:latin typeface="Georgia"/>
               </a:rPr>
               <a:t>Stay</a:t>
             </a:r>
@@ -14344,7 +13849,7 @@
                 <a:solidFill>
                   <a:srgbClr val="677974"/>
                 </a:solidFill>
-                <a:latin typeface="Karla"/>
+                <a:latin typeface="Calibri"/>
               </a:rPr>
               <a:t>Do not disappear afterwards, and do not carry it on your own.</a:t>
             </a:r>
@@ -14386,7 +13891,7 @@
                 <a:solidFill>
                   <a:srgbClr val="677974"/>
                 </a:solidFill>
-                <a:latin typeface="Karla"/>
+                <a:latin typeface="Calibri"/>
               </a:rPr>
               <a:t>All four of those fit inside one conversation, and it takes about two minutes.</a:t>
             </a:r>
@@ -14452,7 +13957,7 @@
                 <a:solidFill>
                   <a:srgbClr val="A1AFAC"/>
                 </a:solidFill>
-                <a:latin typeface="Karla"/>
+                <a:latin typeface="Calibri"/>
               </a:rPr>
               <a:t>The Pastoral Guide</a:t>
             </a:r>
@@ -14494,7 +13999,7 @@
                 <a:solidFill>
                   <a:srgbClr val="A1AFAC"/>
                 </a:solidFill>
-                <a:latin typeface="Karla"/>
+                <a:latin typeface="Calibri"/>
               </a:rPr>
               <a:t>6 / 18</a:t>
             </a:r>
@@ -14611,7 +14116,7 @@
                 <a:solidFill>
                   <a:srgbClr val="2C6D5B"/>
                 </a:solidFill>
-                <a:latin typeface="Karla"/>
+                <a:latin typeface="Calibri"/>
               </a:rPr>
               <a:t>MOVE ONE</a:t>
             </a:r>
@@ -14649,11 +14154,11 @@
               </a:spcAft>
             </a:pPr>
             <a:r>
-              <a:rPr sz="3200" b="1" i="0">
+              <a:rPr sz="3200" b="0" i="0">
                 <a:solidFill>
                   <a:srgbClr val="3C4945"/>
                 </a:solidFill>
-                <a:latin typeface="Libre Caslon Display"/>
+                <a:latin typeface="Georgia"/>
               </a:rPr>
               <a:t>Notice out loud</a:t>
             </a:r>
@@ -14735,11 +14240,11 @@
               </a:spcAft>
             </a:pPr>
             <a:r>
-              <a:rPr sz="1350" b="1" i="0">
+              <a:rPr sz="1350" b="0" i="0">
                 <a:solidFill>
                   <a:srgbClr val="2C6D5B"/>
                 </a:solidFill>
-                <a:latin typeface="Libre Caslon Display"/>
+                <a:latin typeface="Georgia"/>
               </a:rPr>
               <a:t>Gets you “yeah, fine”</a:t>
             </a:r>
@@ -14825,7 +14330,7 @@
                 <a:solidFill>
                   <a:srgbClr val="3C4945"/>
                 </a:solidFill>
-                <a:latin typeface="Karla"/>
+                <a:latin typeface="Calibri"/>
               </a:rPr>
               <a:t>“You alright?”</a:t>
             </a:r>
@@ -14911,7 +14416,7 @@
                 <a:solidFill>
                   <a:srgbClr val="3C4945"/>
                 </a:solidFill>
-                <a:latin typeface="Karla"/>
+                <a:latin typeface="Calibri"/>
               </a:rPr>
               <a:t>“You good?”</a:t>
             </a:r>
@@ -14997,7 +14502,7 @@
                 <a:solidFill>
                   <a:srgbClr val="3C4945"/>
                 </a:solidFill>
-                <a:latin typeface="Karla"/>
+                <a:latin typeface="Calibri"/>
               </a:rPr>
               <a:t>“What is up with you lately?”</a:t>
             </a:r>
@@ -15079,11 +14584,11 @@
               </a:spcAft>
             </a:pPr>
             <a:r>
-              <a:rPr sz="1350" b="1" i="0">
+              <a:rPr sz="1350" b="0" i="0">
                 <a:solidFill>
                   <a:srgbClr val="2C6D5B"/>
                 </a:solidFill>
-                <a:latin typeface="Libre Caslon Display"/>
+                <a:latin typeface="Georgia"/>
               </a:rPr>
               <a:t>Gets you a real answer</a:t>
             </a:r>
@@ -15169,7 +14674,7 @@
                 <a:solidFill>
                   <a:srgbClr val="3C4945"/>
                 </a:solidFill>
-                <a:latin typeface="Karla"/>
+                <a:latin typeface="Calibri"/>
               </a:rPr>
               <a:t>“You have been quiet all week.”</a:t>
             </a:r>
@@ -15255,7 +14760,7 @@
                 <a:solidFill>
                   <a:srgbClr val="3C4945"/>
                 </a:solidFill>
-                <a:latin typeface="Karla"/>
+                <a:latin typeface="Calibri"/>
               </a:rPr>
               <a:t>“You did not come to training. That is not like you.”</a:t>
             </a:r>
@@ -15341,7 +14846,7 @@
                 <a:solidFill>
                   <a:srgbClr val="3C4945"/>
                 </a:solidFill>
-                <a:latin typeface="Karla"/>
+                <a:latin typeface="Calibri"/>
               </a:rPr>
               <a:t>“You have not sat with us at lunch since Monday.”</a:t>
             </a:r>
@@ -15383,7 +14888,7 @@
                 <a:solidFill>
                   <a:srgbClr val="677974"/>
                 </a:solidFill>
-                <a:latin typeface="Karla"/>
+                <a:latin typeface="Calibri"/>
               </a:rPr>
               <a:t>The second set shows you had already noticed, which is a lot harder to shrug off.</a:t>
             </a:r>
@@ -15449,7 +14954,7 @@
                 <a:solidFill>
                   <a:srgbClr val="A1AFAC"/>
                 </a:solidFill>
-                <a:latin typeface="Karla"/>
+                <a:latin typeface="Calibri"/>
               </a:rPr>
               <a:t>The Pastoral Guide</a:t>
             </a:r>
@@ -15491,7 +14996,7 @@
                 <a:solidFill>
                   <a:srgbClr val="A1AFAC"/>
                 </a:solidFill>
-                <a:latin typeface="Karla"/>
+                <a:latin typeface="Calibri"/>
               </a:rPr>
               <a:t>7 / 18</a:t>
             </a:r>
@@ -15608,7 +15113,7 @@
                 <a:solidFill>
                   <a:srgbClr val="2C6D5B"/>
                 </a:solidFill>
-                <a:latin typeface="Karla"/>
+                <a:latin typeface="Calibri"/>
               </a:rPr>
               <a:t>MOVE TWO</a:t>
             </a:r>
@@ -15646,11 +15151,11 @@
               </a:spcAft>
             </a:pPr>
             <a:r>
-              <a:rPr sz="3200" b="1" i="0">
+              <a:rPr sz="3200" b="0" i="0">
                 <a:solidFill>
                   <a:srgbClr val="3C4945"/>
                 </a:solidFill>
-                <a:latin typeface="Libre Caslon Display"/>
+                <a:latin typeface="Georgia"/>
               </a:rPr>
               <a:t>Ask twice</a:t>
             </a:r>
@@ -15692,7 +15197,7 @@
                 <a:solidFill>
                   <a:srgbClr val="677974"/>
                 </a:solidFill>
-                <a:latin typeface="Karla"/>
+                <a:latin typeface="Calibri"/>
               </a:rPr>
               <a:t>Almost nobody tells the truth first time, and very few mind being asked again.</a:t>
             </a:r>
@@ -15822,7 +15327,7 @@
                 <a:solidFill>
                   <a:srgbClr val="FFFDF7"/>
                 </a:solidFill>
-                <a:latin typeface="Karla"/>
+                <a:latin typeface="Calibri"/>
               </a:rPr>
               <a:t>1</a:t>
             </a:r>
@@ -15860,11 +15365,11 @@
               </a:spcAft>
             </a:pPr>
             <a:r>
-              <a:rPr sz="1300" b="1" i="0">
+              <a:rPr sz="1300" b="0" i="0">
                 <a:solidFill>
                   <a:srgbClr val="2C6D5B"/>
                 </a:solidFill>
-                <a:latin typeface="Libre Caslon Display"/>
+                <a:latin typeface="Georgia"/>
               </a:rPr>
               <a:t>“How are you doing?”</a:t>
             </a:r>
@@ -15906,7 +15411,7 @@
                 <a:solidFill>
                   <a:srgbClr val="677974"/>
                 </a:solidFill>
-                <a:latin typeface="Karla"/>
+                <a:latin typeface="Calibri"/>
               </a:rPr>
               <a:t>“Yeah, fine.” That is the polite answer and it costs nothing to give.</a:t>
             </a:r>
@@ -16036,7 +15541,7 @@
                 <a:solidFill>
                   <a:srgbClr val="FFFDF7"/>
                 </a:solidFill>
-                <a:latin typeface="Karla"/>
+                <a:latin typeface="Calibri"/>
               </a:rPr>
               <a:t>2</a:t>
             </a:r>
@@ -16074,11 +15579,11 @@
               </a:spcAft>
             </a:pPr>
             <a:r>
-              <a:rPr sz="1300" b="1" i="0">
+              <a:rPr sz="1300" b="0" i="0">
                 <a:solidFill>
                   <a:srgbClr val="2C6D5B"/>
                 </a:solidFill>
-                <a:latin typeface="Libre Caslon Display"/>
+                <a:latin typeface="Georgia"/>
               </a:rPr>
               <a:t>Then wait. Do not fill the gap.</a:t>
             </a:r>
@@ -16120,7 +15625,7 @@
                 <a:solidFill>
                   <a:srgbClr val="677974"/>
                 </a:solidFill>
-                <a:latin typeface="Karla"/>
+                <a:latin typeface="Calibri"/>
               </a:rPr>
               <a:t>A few seconds of silence does more work than another question does.</a:t>
             </a:r>
@@ -16250,7 +15755,7 @@
                 <a:solidFill>
                   <a:srgbClr val="FFFDF7"/>
                 </a:solidFill>
-                <a:latin typeface="Karla"/>
+                <a:latin typeface="Calibri"/>
               </a:rPr>
               <a:t>3</a:t>
             </a:r>
@@ -16288,11 +15793,11 @@
               </a:spcAft>
             </a:pPr>
             <a:r>
-              <a:rPr sz="1300" b="1" i="0">
+              <a:rPr sz="1300" b="0" i="0">
                 <a:solidFill>
                   <a:srgbClr val="2C6D5B"/>
                 </a:solidFill>
-                <a:latin typeface="Libre Caslon Display"/>
+                <a:latin typeface="Georgia"/>
               </a:rPr>
               <a:t>“No, really. How are you doing?”</a:t>
             </a:r>
@@ -16334,7 +15839,7 @@
                 <a:solidFill>
                   <a:srgbClr val="677974"/>
                 </a:solidFill>
-                <a:latin typeface="Karla"/>
+                <a:latin typeface="Calibri"/>
               </a:rPr>
               <a:t>Different words, same question, and it says you meant the first one.</a:t>
             </a:r>
@@ -16376,7 +15881,7 @@
                 <a:solidFill>
                   <a:srgbClr val="677974"/>
                 </a:solidFill>
-                <a:latin typeface="Karla"/>
+                <a:latin typeface="Calibri"/>
               </a:rPr>
               <a:t>If the answer is still fine, leave it and come back another day. Asking twice is not the same as pushing.</a:t>
             </a:r>
@@ -16442,7 +15947,7 @@
                 <a:solidFill>
                   <a:srgbClr val="A1AFAC"/>
                 </a:solidFill>
-                <a:latin typeface="Karla"/>
+                <a:latin typeface="Calibri"/>
               </a:rPr>
               <a:t>The Pastoral Guide</a:t>
             </a:r>
@@ -16484,7 +15989,7 @@
                 <a:solidFill>
                   <a:srgbClr val="A1AFAC"/>
                 </a:solidFill>
-                <a:latin typeface="Karla"/>
+                <a:latin typeface="Calibri"/>
               </a:rPr>
               <a:t>8 / 18</a:t>
             </a:r>
@@ -16601,7 +16106,7 @@
                 <a:solidFill>
                   <a:srgbClr val="2C6D5B"/>
                 </a:solidFill>
-                <a:latin typeface="Karla"/>
+                <a:latin typeface="Calibri"/>
               </a:rPr>
               <a:t>MOVE THREE</a:t>
             </a:r>
@@ -16639,11 +16144,11 @@
               </a:spcAft>
             </a:pPr>
             <a:r>
-              <a:rPr sz="3200" b="1" i="0">
+              <a:rPr sz="3200" b="0" i="0">
                 <a:solidFill>
                   <a:srgbClr val="3C4945"/>
                 </a:solidFill>
-                <a:latin typeface="Libre Caslon Display"/>
+                <a:latin typeface="Georgia"/>
               </a:rPr>
               <a:t>Listen without fixing</a:t>
             </a:r>
@@ -16725,11 +16230,11 @@
               </a:spcAft>
             </a:pPr>
             <a:r>
-              <a:rPr sz="1350" b="1" i="0">
+              <a:rPr sz="1350" b="0" i="0">
                 <a:solidFill>
                   <a:srgbClr val="2C6D5B"/>
                 </a:solidFill>
-                <a:latin typeface="Libre Caslon Display"/>
+                <a:latin typeface="Georgia"/>
               </a:rPr>
               <a:t>What we reach for</a:t>
             </a:r>
@@ -16815,7 +16320,7 @@
                 <a:solidFill>
                   <a:srgbClr val="3C4945"/>
                 </a:solidFill>
-                <a:latin typeface="Karla"/>
+                <a:latin typeface="Calibri"/>
               </a:rPr>
               <a:t>Advice they did not ask for</a:t>
             </a:r>
@@ -16901,7 +16406,7 @@
                 <a:solidFill>
                   <a:srgbClr val="3C4945"/>
                 </a:solidFill>
-                <a:latin typeface="Karla"/>
+                <a:latin typeface="Calibri"/>
               </a:rPr>
               <a:t>“At least it is not as bad as...”</a:t>
             </a:r>
@@ -16987,7 +16492,7 @@
                 <a:solidFill>
                   <a:srgbClr val="3C4945"/>
                 </a:solidFill>
-                <a:latin typeface="Karla"/>
+                <a:latin typeface="Calibri"/>
               </a:rPr>
               <a:t>A story about yourself</a:t>
             </a:r>
@@ -17069,11 +16574,11 @@
               </a:spcAft>
             </a:pPr>
             <a:r>
-              <a:rPr sz="1350" b="1" i="0">
+              <a:rPr sz="1350" b="0" i="0">
                 <a:solidFill>
                   <a:srgbClr val="2C6D5B"/>
                 </a:solidFill>
-                <a:latin typeface="Libre Caslon Display"/>
+                <a:latin typeface="Georgia"/>
               </a:rPr>
               <a:t>What actually helps</a:t>
             </a:r>
@@ -17159,7 +16664,7 @@
                 <a:solidFill>
                   <a:srgbClr val="3C4945"/>
                 </a:solidFill>
-                <a:latin typeface="Karla"/>
+                <a:latin typeface="Calibri"/>
               </a:rPr>
               <a:t>“So it is mostly when you are at home.”</a:t>
             </a:r>
@@ -17245,7 +16750,7 @@
                 <a:solidFill>
                   <a:srgbClr val="3C4945"/>
                 </a:solidFill>
-                <a:latin typeface="Karla"/>
+                <a:latin typeface="Calibri"/>
               </a:rPr>
               <a:t>“That sounds exhausting.”</a:t>
             </a:r>
@@ -17331,7 +16836,7 @@
                 <a:solidFill>
                   <a:srgbClr val="3C4945"/>
                 </a:solidFill>
-                <a:latin typeface="Karla"/>
+                <a:latin typeface="Calibri"/>
               </a:rPr>
               <a:t>“How long has it been like this?”</a:t>
             </a:r>
@@ -17373,7 +16878,7 @@
                 <a:solidFill>
                   <a:srgbClr val="677974"/>
                 </a:solidFill>
-                <a:latin typeface="Karla"/>
+                <a:latin typeface="Calibri"/>
               </a:rPr>
               <a:t>Repeating somebody’s own words back to them feels odd the first time you do it. Do it anyway.</a:t>
             </a:r>
@@ -17439,7 +16944,7 @@
                 <a:solidFill>
                   <a:srgbClr val="A1AFAC"/>
                 </a:solidFill>
-                <a:latin typeface="Karla"/>
+                <a:latin typeface="Calibri"/>
               </a:rPr>
               <a:t>The Pastoral Guide</a:t>
             </a:r>
@@ -17481,7 +16986,7 @@
                 <a:solidFill>
                   <a:srgbClr val="A1AFAC"/>
                 </a:solidFill>
-                <a:latin typeface="Karla"/>
+                <a:latin typeface="Calibri"/>
               </a:rPr>
               <a:t>9 / 18</a:t>
             </a:r>
